--- a/presentations/PR_L07_Lists_Lesson.pptx
+++ b/presentations/PR_L07_Lists_Lesson.pptx
@@ -2167,7 +2167,7 @@
                 <a:ea typeface="IBM Plex Sans" pitchFamily="34" charset="-122"/>
                 <a:cs typeface="IBM Plex Sans" pitchFamily="34" charset="-120"/>
               </a:rPr>
-              <a:t>One variable holds one value, which is no use at all for a whole class of marks. A list holds many values under one name, and the stock shelves are where you learn to use one.</a:t>
+              <a:t>One variable holds one value, which is no use at all for a whole class of marks. A list holds many values under one name, and the six stations here are where you learn to use one.</a:t>
             </a:r>
             <a:endParaRPr lang="en-US" sz="1800" dirty="0"/>
           </a:p>
@@ -2569,7 +2569,7 @@
                 <a:ea typeface="IBM Plex Sans" pitchFamily="34" charset="-122"/>
                 <a:cs typeface="IBM Plex Sans" pitchFamily="34" charset="-120"/>
               </a:rPr>
-              <a:t>One pass can build the total, count the items and remember where the best mark was.</a:t>
+              <a:t>One pass can build the total, count the items and remember where the largest one was.</a:t>
             </a:r>
             <a:endParaRPr lang="en-US" sz="1700" dirty="0"/>
           </a:p>
@@ -2617,7 +2617,7 @@
                 <a:ea typeface="IBM Plex Sans" pitchFamily="34" charset="-122"/>
                 <a:cs typeface="IBM Plex Sans" pitchFamily="34" charset="-120"/>
               </a:rPr>
-              <a:t>Common mistake: finding the best value but forgetting to record the position it was found at.</a:t>
+              <a:t>Common mistake: finding the largest value but forgetting to record the position it was found at.</a:t>
             </a:r>
             <a:endParaRPr lang="en-US" sz="1700" dirty="0"/>
           </a:p>
@@ -2725,7 +2725,7 @@
                 <a:ea typeface="IBM Plex Sans" pitchFamily="34" charset="-122"/>
                 <a:cs typeface="IBM Plex Sans" pitchFamily="34" charset="-120"/>
               </a:rPr>
-              <a:t>Plan the variables needed to report on eight marks in a single pass.</a:t>
+              <a:t>How would you report both the largest value and where in the list it sits?</a:t>
             </a:r>
             <a:endParaRPr lang="en-US" sz="1600" dirty="0"/>
           </a:p>
@@ -2805,7 +2805,7 @@
                 <a:ea typeface="IBM Plex Sans" pitchFamily="34" charset="-122"/>
                 <a:cs typeface="IBM Plex Sans" pitchFamily="34" charset="-120"/>
               </a:rPr>
-              <a:t>Keeping the position of the best value as well as the value answers 'which one' as well as 'how much'.</a:t>
+              <a:t>Keeping the position of the largest value as well as the value itself answers which one as well as...</a:t>
             </a:r>
             <a:endParaRPr lang="en-US" sz="1600" dirty="0"/>
           </a:p>
@@ -3104,7 +3104,7 @@
                 <a:ea typeface="IBM Plex Sans" pitchFamily="34" charset="-122"/>
                 <a:cs typeface="IBM Plex Sans" pitchFamily="34" charset="-120"/>
               </a:rPr>
-              <a:t>The basket holds ["tea", "jam", "rice"]. Tap the star and match each list operation to what it does.</a:t>
+              <a:t>A list called basket holds ["tea", "jam", "rice"]. Tap the star and match each list operation to what it does.</a:t>
             </a:r>
             <a:endParaRPr lang="en-US" sz="2200" dirty="0"/>
           </a:p>
@@ -4060,7 +4060,7 @@
                 <a:ea typeface="IBM Plex Sans" pitchFamily="34" charset="-122"/>
                 <a:cs typeface="IBM Plex Sans" pitchFamily="34" charset="-120"/>
               </a:rPr>
-              <a:t>A loop over a list of six prices begins for i in range(1, 6). State which price is never looked at, and rewrite the line so that every price is included.</a:t>
+              <a:t>A loop over a list of six numbers begins for i in range(1, 6). State which item is never looked at, and rewrite the line so that every item is included.</a:t>
             </a:r>
             <a:endParaRPr lang="en-US" sz="1700" dirty="0"/>
           </a:p>
@@ -4190,7 +4190,7 @@
                 <a:ea typeface="IBM Plex Sans" pitchFamily="34" charset="-122"/>
                 <a:cs typeface="IBM Plex Sans" pitchFamily="34" charset="-120"/>
               </a:rPr>
-              <a:t>Write a program that reads 6 javelin throws in metres into a list, then prints the longest throw and the position it is stored at.</a:t>
+              <a:t>Write a program that reads seven whole numbers into a list, then prints the largest and the position it is stored at, without using max().</a:t>
             </a:r>
             <a:endParaRPr lang="en-US" sz="1700" dirty="0"/>
           </a:p>
@@ -4320,7 +4320,7 @@
                 <a:ea typeface="IBM Plex Sans" pitchFamily="34" charset="-122"/>
                 <a:cs typeface="IBM Plex Sans" pitchFamily="34" charset="-120"/>
               </a:rPr>
-              <a:t>Write a program that holds a list of five club members, removes a name the user types in, then prints the list and how many members are left.</a:t>
+              <a:t>Write a program that reads five words into a list, removes a word the user types in, then prints the words that are left and how many there are.</a:t>
             </a:r>
             <a:endParaRPr lang="en-US" sz="1700" dirty="0"/>
           </a:p>
@@ -6722,7 +6722,7 @@
                 <a:ea typeface="IBM Plex Sans" pitchFamily="34" charset="-122"/>
                 <a:cs typeface="IBM Plex Sans" pitchFamily="34" charset="-120"/>
               </a:rPr>
-              <a:t>The list shelf holds Nails, Screws, Bolts and Nuts, in that order. Write down what shelf[0], shelf[3] and len(shelf) each give, and the index of the last item.</a:t>
+              <a:t>The list words holds red, blue, green and teal, in that order. Write down what words[0], words[3] and len(words) each give, and the index of the last item.</a:t>
             </a:r>
             <a:endParaRPr lang="en-US" sz="2600" dirty="0"/>
           </a:p>
@@ -7881,7 +7881,7 @@
                 <a:ea typeface="IBM Plex Sans" pitchFamily="34" charset="-122"/>
                 <a:cs typeface="IBM Plex Sans" pitchFamily="34" charset="-120"/>
               </a:rPr>
-              <a:t>A list can start out empty and be filled by a loop as the data arrives.</a:t>
+              <a:t>A list can start out empty and be filled by a loop as the values arrive.</a:t>
             </a:r>
             <a:endParaRPr lang="en-US" sz="1700" dirty="0"/>
           </a:p>
@@ -8093,7 +8093,7 @@
                 <a:ea typeface="IBM Plex Sans" pitchFamily="34" charset="-122"/>
                 <a:cs typeface="IBM Plex Sans" pitchFamily="34" charset="-120"/>
               </a:rPr>
-              <a:t>The exam calls these arrays. Python calls them lists, and unlike an array they can grow and shrink.</a:t>
+              <a:t>The exam calls these arrays, but a Python list is different in one way: it can...</a:t>
             </a:r>
             <a:endParaRPr lang="en-US" sz="1600" dirty="0"/>
           </a:p>
@@ -8589,7 +8589,7 @@
                 <a:ea typeface="IBM Plex Sans" pitchFamily="34" charset="-122"/>
                 <a:cs typeface="IBM Plex Sans" pitchFamily="34" charset="-120"/>
               </a:rPr>
-              <a:t>Which index holds the last of seven scores?</a:t>
+              <a:t>Which index holds the last of seven values?</a:t>
             </a:r>
             <a:endParaRPr lang="en-US" sz="1600" dirty="0"/>
           </a:p>
@@ -8669,7 +8669,7 @@
                 <a:ea typeface="IBM Plex Sans" pitchFamily="34" charset="-122"/>
                 <a:cs typeface="IBM Plex Sans" pitchFamily="34" charset="-120"/>
               </a:rPr>
-              <a:t>Counting from 0 means an index is the number of items you step over to reach it.</a:t>
+              <a:t>Counting from 0 means an index is the number of items you have to step over to...</a:t>
             </a:r>
             <a:endParaRPr lang="en-US" sz="1600" dirty="0"/>
           </a:p>
@@ -9245,7 +9245,7 @@
                 <a:ea typeface="IBM Plex Sans" pitchFamily="34" charset="-122"/>
                 <a:cs typeface="IBM Plex Sans" pitchFamily="34" charset="-120"/>
               </a:rPr>
-              <a:t>Going through every item of a list in turn is called traversing it.</a:t>
+              <a:t>Going through every item of a list in turn is called...</a:t>
             </a:r>
             <a:endParaRPr lang="en-US" sz="1600" dirty="0"/>
           </a:p>
@@ -9741,7 +9741,7 @@
                 <a:ea typeface="IBM Plex Sans" pitchFamily="34" charset="-122"/>
                 <a:cs typeface="IBM Plex Sans" pitchFamily="34" charset="-120"/>
               </a:rPr>
-              <a:t>What is the difference between remove("Ada") and pop(0)?</a:t>
+              <a:t>What is the difference between remove("red") and pop(0)?</a:t>
             </a:r>
             <a:endParaRPr lang="en-US" sz="1600" dirty="0"/>
           </a:p>
@@ -9821,7 +9821,7 @@
                 <a:ea typeface="IBM Plex Sans" pitchFamily="34" charset="-122"/>
                 <a:cs typeface="IBM Plex Sans" pitchFamily="34" charset="-120"/>
               </a:rPr>
-              <a:t>pop() hands the removed item back, so it can be used as well as deleted.</a:t>
+              <a:t>pop() does two jobs at once: it takes the item out and it also...</a:t>
             </a:r>
             <a:endParaRPr lang="en-US" sz="1600" dirty="0"/>
           </a:p>
@@ -10161,7 +10161,7 @@
                 <a:ea typeface="IBM Plex Sans" pitchFamily="34" charset="-122"/>
                 <a:cs typeface="IBM Plex Sans" pitchFamily="34" charset="-120"/>
               </a:rPr>
-              <a:t>Total the list in a loop, then divide by len() to get the mean.</a:t>
+              <a:t>Total the list in a loop, then divide by len() to get the average.</a:t>
             </a:r>
             <a:endParaRPr lang="en-US" sz="1700" dirty="0"/>
           </a:p>
@@ -10185,7 +10185,7 @@
                 <a:ea typeface="IBM Plex Sans" pitchFamily="34" charset="-122"/>
                 <a:cs typeface="IBM Plex Sans" pitchFamily="34" charset="-120"/>
               </a:rPr>
-              <a:t>Track the highest and lowest by comparing each item against the best found so far.</a:t>
+              <a:t>Track the largest and smallest by comparing each item against the best found so far.</a:t>
             </a:r>
             <a:endParaRPr lang="en-US" sz="1700" dirty="0"/>
           </a:p>
@@ -10209,7 +10209,7 @@
                 <a:ea typeface="IBM Plex Sans" pitchFamily="34" charset="-122"/>
                 <a:cs typeface="IBM Plex Sans" pitchFamily="34" charset="-120"/>
               </a:rPr>
-              <a:t>Common mistake: starting the highest at 0, which fails on a list of negative numbers.</a:t>
+              <a:t>Common mistake: starting the largest at 0, which fails on a list of negative numbers.</a:t>
             </a:r>
             <a:endParaRPr lang="en-US" sz="1700" dirty="0"/>
           </a:p>
@@ -10317,7 +10317,7 @@
                 <a:ea typeface="IBM Plex Sans" pitchFamily="34" charset="-122"/>
                 <a:cs typeface="IBM Plex Sans" pitchFamily="34" charset="-120"/>
               </a:rPr>
-              <a:t>What should the highest-so-far start as, if the data could be negative?</a:t>
+              <a:t>What should the largest-so-far start as, if the values could be negative?</a:t>
             </a:r>
             <a:endParaRPr lang="en-US" sz="1600" dirty="0"/>
           </a:p>
@@ -10397,7 +10397,7 @@
                 <a:ea typeface="IBM Plex Sans" pitchFamily="34" charset="-122"/>
                 <a:cs typeface="IBM Plex Sans" pitchFamily="34" charset="-120"/>
               </a:rPr>
-              <a:t>Dividing by len() on an empty list crashes, so check the list is not empty first.</a:t>
+              <a:t>Dividing by len() on an empty list crashes, so a robust program first checks the list is not...</a:t>
             </a:r>
             <a:endParaRPr lang="en-US" sz="1600" dirty="0"/>
           </a:p>

--- a/presentations/PR_L07_Lists_Lesson.pptx
+++ b/presentations/PR_L07_Lists_Lesson.pptx
@@ -4060,7 +4060,245 @@
                 <a:ea typeface="IBM Plex Sans" pitchFamily="34" charset="-122"/>
                 <a:cs typeface="IBM Plex Sans" pitchFamily="34" charset="-120"/>
               </a:rPr>
-              <a:t>A loop over a list of six numbers begins for i in range(1, 6). State which item is never looked at, and rewrite the line so that every item is included.</a:t>
+              <a:t>A loop over a list of six numbers begins </a:t>
+            </a:r>
+            <a:pPr indent="0" marL="0">
+              <a:lnSpc>
+                <a:spcPct val="118000"/>
+              </a:lnSpc>
+              <a:buNone/>
+            </a:pPr>
+            <a:r>
+              <a:rPr lang="en-US" sz="1700" dirty="0">
+                <a:solidFill>
+                  <a:srgbClr val="6B21A8"/>
+                </a:solidFill>
+                <a:latin typeface="IBM Plex Mono" pitchFamily="34" charset="0"/>
+                <a:ea typeface="IBM Plex Mono" pitchFamily="34" charset="-122"/>
+                <a:cs typeface="IBM Plex Mono" pitchFamily="34" charset="-120"/>
+              </a:rPr>
+              <a:t>for</a:t>
+            </a:r>
+            <a:pPr indent="0" marL="0">
+              <a:lnSpc>
+                <a:spcPct val="118000"/>
+              </a:lnSpc>
+              <a:buNone/>
+            </a:pPr>
+            <a:r>
+              <a:rPr lang="en-US" sz="1700" dirty="0">
+                <a:solidFill>
+                  <a:srgbClr val="18181B"/>
+                </a:solidFill>
+                <a:latin typeface="IBM Plex Mono" pitchFamily="34" charset="0"/>
+                <a:ea typeface="IBM Plex Mono" pitchFamily="34" charset="-122"/>
+                <a:cs typeface="IBM Plex Mono" pitchFamily="34" charset="-120"/>
+              </a:rPr>
+              <a:t> </a:t>
+            </a:r>
+            <a:pPr indent="0" marL="0">
+              <a:lnSpc>
+                <a:spcPct val="118000"/>
+              </a:lnSpc>
+              <a:buNone/>
+            </a:pPr>
+            <a:r>
+              <a:rPr lang="en-US" sz="1700" dirty="0">
+                <a:solidFill>
+                  <a:srgbClr val="18181B"/>
+                </a:solidFill>
+                <a:latin typeface="IBM Plex Mono" pitchFamily="34" charset="0"/>
+                <a:ea typeface="IBM Plex Mono" pitchFamily="34" charset="-122"/>
+                <a:cs typeface="IBM Plex Mono" pitchFamily="34" charset="-120"/>
+              </a:rPr>
+              <a:t>i</a:t>
+            </a:r>
+            <a:pPr indent="0" marL="0">
+              <a:lnSpc>
+                <a:spcPct val="118000"/>
+              </a:lnSpc>
+              <a:buNone/>
+            </a:pPr>
+            <a:r>
+              <a:rPr lang="en-US" sz="1700" dirty="0">
+                <a:solidFill>
+                  <a:srgbClr val="18181B"/>
+                </a:solidFill>
+                <a:latin typeface="IBM Plex Mono" pitchFamily="34" charset="0"/>
+                <a:ea typeface="IBM Plex Mono" pitchFamily="34" charset="-122"/>
+                <a:cs typeface="IBM Plex Mono" pitchFamily="34" charset="-120"/>
+              </a:rPr>
+              <a:t> </a:t>
+            </a:r>
+            <a:pPr indent="0" marL="0">
+              <a:lnSpc>
+                <a:spcPct val="118000"/>
+              </a:lnSpc>
+              <a:buNone/>
+            </a:pPr>
+            <a:r>
+              <a:rPr lang="en-US" sz="1700" dirty="0">
+                <a:solidFill>
+                  <a:srgbClr val="6B21A8"/>
+                </a:solidFill>
+                <a:latin typeface="IBM Plex Mono" pitchFamily="34" charset="0"/>
+                <a:ea typeface="IBM Plex Mono" pitchFamily="34" charset="-122"/>
+                <a:cs typeface="IBM Plex Mono" pitchFamily="34" charset="-120"/>
+              </a:rPr>
+              <a:t>in</a:t>
+            </a:r>
+            <a:pPr indent="0" marL="0">
+              <a:lnSpc>
+                <a:spcPct val="118000"/>
+              </a:lnSpc>
+              <a:buNone/>
+            </a:pPr>
+            <a:r>
+              <a:rPr lang="en-US" sz="1700" dirty="0">
+                <a:solidFill>
+                  <a:srgbClr val="18181B"/>
+                </a:solidFill>
+                <a:latin typeface="IBM Plex Mono" pitchFamily="34" charset="0"/>
+                <a:ea typeface="IBM Plex Mono" pitchFamily="34" charset="-122"/>
+                <a:cs typeface="IBM Plex Mono" pitchFamily="34" charset="-120"/>
+              </a:rPr>
+              <a:t> </a:t>
+            </a:r>
+            <a:pPr indent="0" marL="0">
+              <a:lnSpc>
+                <a:spcPct val="118000"/>
+              </a:lnSpc>
+              <a:buNone/>
+            </a:pPr>
+            <a:r>
+              <a:rPr lang="en-US" sz="1700" dirty="0">
+                <a:solidFill>
+                  <a:srgbClr val="1D4ED8"/>
+                </a:solidFill>
+                <a:latin typeface="IBM Plex Mono" pitchFamily="34" charset="0"/>
+                <a:ea typeface="IBM Plex Mono" pitchFamily="34" charset="-122"/>
+                <a:cs typeface="IBM Plex Mono" pitchFamily="34" charset="-120"/>
+              </a:rPr>
+              <a:t>range</a:t>
+            </a:r>
+            <a:pPr indent="0" marL="0">
+              <a:lnSpc>
+                <a:spcPct val="118000"/>
+              </a:lnSpc>
+              <a:buNone/>
+            </a:pPr>
+            <a:r>
+              <a:rPr lang="en-US" sz="1700" dirty="0">
+                <a:solidFill>
+                  <a:srgbClr val="3F3F46"/>
+                </a:solidFill>
+                <a:latin typeface="IBM Plex Mono" pitchFamily="34" charset="0"/>
+                <a:ea typeface="IBM Plex Mono" pitchFamily="34" charset="-122"/>
+                <a:cs typeface="IBM Plex Mono" pitchFamily="34" charset="-120"/>
+              </a:rPr>
+              <a:t>(</a:t>
+            </a:r>
+            <a:pPr indent="0" marL="0">
+              <a:lnSpc>
+                <a:spcPct val="118000"/>
+              </a:lnSpc>
+              <a:buNone/>
+            </a:pPr>
+            <a:r>
+              <a:rPr lang="en-US" sz="1700" dirty="0">
+                <a:solidFill>
+                  <a:srgbClr val="9A3412"/>
+                </a:solidFill>
+                <a:latin typeface="IBM Plex Mono" pitchFamily="34" charset="0"/>
+                <a:ea typeface="IBM Plex Mono" pitchFamily="34" charset="-122"/>
+                <a:cs typeface="IBM Plex Mono" pitchFamily="34" charset="-120"/>
+              </a:rPr>
+              <a:t>1</a:t>
+            </a:r>
+            <a:pPr indent="0" marL="0">
+              <a:lnSpc>
+                <a:spcPct val="118000"/>
+              </a:lnSpc>
+              <a:buNone/>
+            </a:pPr>
+            <a:r>
+              <a:rPr lang="en-US" sz="1700" dirty="0">
+                <a:solidFill>
+                  <a:srgbClr val="3F3F46"/>
+                </a:solidFill>
+                <a:latin typeface="IBM Plex Mono" pitchFamily="34" charset="0"/>
+                <a:ea typeface="IBM Plex Mono" pitchFamily="34" charset="-122"/>
+                <a:cs typeface="IBM Plex Mono" pitchFamily="34" charset="-120"/>
+              </a:rPr>
+              <a:t>,</a:t>
+            </a:r>
+            <a:pPr indent="0" marL="0">
+              <a:lnSpc>
+                <a:spcPct val="118000"/>
+              </a:lnSpc>
+              <a:buNone/>
+            </a:pPr>
+            <a:r>
+              <a:rPr lang="en-US" sz="1700" dirty="0">
+                <a:solidFill>
+                  <a:srgbClr val="18181B"/>
+                </a:solidFill>
+                <a:latin typeface="IBM Plex Mono" pitchFamily="34" charset="0"/>
+                <a:ea typeface="IBM Plex Mono" pitchFamily="34" charset="-122"/>
+                <a:cs typeface="IBM Plex Mono" pitchFamily="34" charset="-120"/>
+              </a:rPr>
+              <a:t> </a:t>
+            </a:r>
+            <a:pPr indent="0" marL="0">
+              <a:lnSpc>
+                <a:spcPct val="118000"/>
+              </a:lnSpc>
+              <a:buNone/>
+            </a:pPr>
+            <a:r>
+              <a:rPr lang="en-US" sz="1700" dirty="0">
+                <a:solidFill>
+                  <a:srgbClr val="9A3412"/>
+                </a:solidFill>
+                <a:latin typeface="IBM Plex Mono" pitchFamily="34" charset="0"/>
+                <a:ea typeface="IBM Plex Mono" pitchFamily="34" charset="-122"/>
+                <a:cs typeface="IBM Plex Mono" pitchFamily="34" charset="-120"/>
+              </a:rPr>
+              <a:t>6</a:t>
+            </a:r>
+            <a:pPr indent="0" marL="0">
+              <a:lnSpc>
+                <a:spcPct val="118000"/>
+              </a:lnSpc>
+              <a:buNone/>
+            </a:pPr>
+            <a:r>
+              <a:rPr lang="en-US" sz="1700" dirty="0">
+                <a:solidFill>
+                  <a:srgbClr val="3F3F46"/>
+                </a:solidFill>
+                <a:latin typeface="IBM Plex Mono" pitchFamily="34" charset="0"/>
+                <a:ea typeface="IBM Plex Mono" pitchFamily="34" charset="-122"/>
+                <a:cs typeface="IBM Plex Mono" pitchFamily="34" charset="-120"/>
+              </a:rPr>
+              <a:t>)</a:t>
+            </a:r>
+            <a:pPr indent="0" marL="0">
+              <a:lnSpc>
+                <a:spcPct val="118000"/>
+              </a:lnSpc>
+              <a:buNone/>
+            </a:pPr>
+            <a:r>
+              <a:rPr lang="en-US" sz="1700" dirty="0">
+                <a:solidFill>
+                  <a:srgbClr val="101828"/>
+                </a:solidFill>
+                <a:latin typeface="IBM Plex Sans" pitchFamily="34" charset="0"/>
+                <a:ea typeface="IBM Plex Sans" pitchFamily="34" charset="-122"/>
+                <a:cs typeface="IBM Plex Sans" pitchFamily="34" charset="-120"/>
+              </a:rPr>
+              <a:t>. State which item is never looked at, and rewrite the line so that every item is included.</a:t>
             </a:r>
             <a:endParaRPr lang="en-US" sz="1700" dirty="0"/>
           </a:p>
@@ -4190,7 +4428,75 @@
                 <a:ea typeface="IBM Plex Sans" pitchFamily="34" charset="-122"/>
                 <a:cs typeface="IBM Plex Sans" pitchFamily="34" charset="-120"/>
               </a:rPr>
-              <a:t>Write a program that reads seven whole numbers into a list, then prints the largest and the position it is stored at, without using max().</a:t>
+              <a:t>Write a program that reads seven whole numbers into a list, then prints the largest and the position it is stored at, without using </a:t>
+            </a:r>
+            <a:pPr indent="0" marL="0">
+              <a:lnSpc>
+                <a:spcPct val="118000"/>
+              </a:lnSpc>
+              <a:buNone/>
+            </a:pPr>
+            <a:r>
+              <a:rPr lang="en-US" sz="1700" dirty="0">
+                <a:solidFill>
+                  <a:srgbClr val="1D4ED8"/>
+                </a:solidFill>
+                <a:latin typeface="IBM Plex Mono" pitchFamily="34" charset="0"/>
+                <a:ea typeface="IBM Plex Mono" pitchFamily="34" charset="-122"/>
+                <a:cs typeface="IBM Plex Mono" pitchFamily="34" charset="-120"/>
+              </a:rPr>
+              <a:t>max</a:t>
+            </a:r>
+            <a:pPr indent="0" marL="0">
+              <a:lnSpc>
+                <a:spcPct val="118000"/>
+              </a:lnSpc>
+              <a:buNone/>
+            </a:pPr>
+            <a:r>
+              <a:rPr lang="en-US" sz="1700" dirty="0">
+                <a:solidFill>
+                  <a:srgbClr val="3F3F46"/>
+                </a:solidFill>
+                <a:latin typeface="IBM Plex Mono" pitchFamily="34" charset="0"/>
+                <a:ea typeface="IBM Plex Mono" pitchFamily="34" charset="-122"/>
+                <a:cs typeface="IBM Plex Mono" pitchFamily="34" charset="-120"/>
+              </a:rPr>
+              <a:t>(</a:t>
+            </a:r>
+            <a:pPr indent="0" marL="0">
+              <a:lnSpc>
+                <a:spcPct val="118000"/>
+              </a:lnSpc>
+              <a:buNone/>
+            </a:pPr>
+            <a:r>
+              <a:rPr lang="en-US" sz="1700" dirty="0">
+                <a:solidFill>
+                  <a:srgbClr val="3F3F46"/>
+                </a:solidFill>
+                <a:latin typeface="IBM Plex Mono" pitchFamily="34" charset="0"/>
+                <a:ea typeface="IBM Plex Mono" pitchFamily="34" charset="-122"/>
+                <a:cs typeface="IBM Plex Mono" pitchFamily="34" charset="-120"/>
+              </a:rPr>
+              <a:t>)</a:t>
+            </a:r>
+            <a:pPr indent="0" marL="0">
+              <a:lnSpc>
+                <a:spcPct val="118000"/>
+              </a:lnSpc>
+              <a:buNone/>
+            </a:pPr>
+            <a:r>
+              <a:rPr lang="en-US" sz="1700" dirty="0">
+                <a:solidFill>
+                  <a:srgbClr val="101828"/>
+                </a:solidFill>
+                <a:latin typeface="IBM Plex Sans" pitchFamily="34" charset="0"/>
+                <a:ea typeface="IBM Plex Sans" pitchFamily="34" charset="-122"/>
+                <a:cs typeface="IBM Plex Sans" pitchFamily="34" charset="-120"/>
+              </a:rPr>
+              <a:t>.</a:t>
             </a:r>
             <a:endParaRPr lang="en-US" sz="1700" dirty="0"/>
           </a:p>

--- a/presentations/PR_L07_Lists_Lesson.pptx
+++ b/presentations/PR_L07_Lists_Lesson.pptx
@@ -19,9 +19,10 @@
     <p:sldId id="267" r:id="rId13"/>
     <p:sldId id="268" r:id="rId14"/>
     <p:sldId id="269" r:id="rId15"/>
+    <p:sldId id="270" r:id="rId16"/>
   </p:sldIdLst>
   <p:notesMasterIdLst>
-    <p:notesMasterId r:id="rId16"/>
+    <p:notesMasterId r:id="rId17"/>
   </p:notesMasterIdLst>
   <p:sldSz cx="12192000" cy="6858000"/>
   <p:notesSz cx="6858000" cy="12192000"/>
@@ -692,7 +693,14 @@
           <a:p>
             <a:r>
               <a:rPr lang="en-US" dirty="0"/>
-              <a:t>Make them commit to an answer on paper before they tap the star. Guessing first costs them the learning.</a:t>
+              <a:t>The answer is B: ['cat', 'dog', 'ant']
+3.
+Do not say it yet. Every pupil commits first - fingers, whiteboards or a show of hands on each letter in turn - and you count the split before anyone can change their mind.
+IF MOST OF THE CLASS IS RIGHT: say why it is right in one sentence and go straight on to the independent work.
+IF A SIGNIFICANT GROUP IS ON ONE WRONG LETTER: that option is the misconception to teach against before anyone goes on. Go back to station 4, Adding and removing, and work through its example again, aloud, with the class watching, then re-ask this question.
+The course's own response to a wrong answer here: The new item goes on the end and not the front, and the list is one longer than it was.
+A limitation, stated rather than papered over: one response covers every wrong option; it does not say what to revisit for each one. The course does not record what each separate wrong option means, and this slide does not invent it. Decide your own reteach for each option before the lesson; the options above are the start of it.
+This is a real activity from the experience (pr-l07-s4-c2), so the wording here is the wording a pupil will see.</a:t>
             </a:r>
             <a:endParaRPr lang="en-US" dirty="0"/>
           </a:p>
@@ -780,7 +788,7 @@
           <a:p>
             <a:r>
               <a:rPr lang="en-US" dirty="0"/>
-              <a:t>Use these as a settler, or as something for early finishers to read in the experience.</a:t>
+              <a:t>Make them commit to an answer on paper before they tap the star. Guessing first costs them the learning.</a:t>
             </a:r>
             <a:endParaRPr lang="en-US" dirty="0"/>
           </a:p>
@@ -868,7 +876,7 @@
           <a:p>
             <a:r>
               <a:rPr lang="en-US" dirty="0"/>
-              <a:t>Timed and silent. Mark against the answer sheet, then ask students to record their weakest area.</a:t>
+              <a:t>Use these as a settler, or as something for early finishers to read in the experience.</a:t>
             </a:r>
             <a:endParaRPr lang="en-US" dirty="0"/>
           </a:p>
@@ -956,7 +964,7 @@
           <a:p>
             <a:r>
               <a:rPr lang="en-US" dirty="0"/>
-              <a:t>Students copy their score-screen breakdown onto the worksheet, then rate themselves here.</a:t>
+              <a:t>Timed and silent. Mark against the answer sheet, then ask students to record their weakest area.</a:t>
             </a:r>
             <a:endParaRPr lang="en-US" dirty="0"/>
           </a:p>
@@ -980,6 +988,94 @@
             <a:fld id="{F7021451-1387-4CA6-816F-3879F97B5CBC}" type="slidenum">
               <a:rPr lang="en-US"/>
               <a:t>14</a:t>
+            </a:fld>
+            <a:endParaRPr lang="en-US"/>
+          </a:p>
+        </p:txBody>
+      </p:sp>
+    </p:spTree>
+    <p:extLst>
+      <p:ext uri="{BB962C8B-B14F-4D97-AF65-F5344CB8AC3E}">
+        <p14:creationId xmlns:p14="http://schemas.microsoft.com/office/powerpoint/2010/main" val="1024086991"/>
+      </p:ext>
+    </p:extLst>
+  </p:cSld>
+  <p:clrMapOvr>
+    <a:masterClrMapping/>
+  </p:clrMapOvr>
+</p:notes>
+</file>
+
+<file path=ppt/notesSlides/notesSlide15.xml><?xml version="1.0" encoding="utf-8"?>
+<p:notes xmlns:a="http://schemas.openxmlformats.org/drawingml/2006/main" xmlns:r="http://schemas.openxmlformats.org/officeDocument/2006/relationships" xmlns:p="http://schemas.openxmlformats.org/presentationml/2006/main">
+  <p:cSld>
+    <p:spTree>
+      <p:nvGrpSpPr>
+        <p:cNvPr id="1" name=""/>
+        <p:cNvGrpSpPr/>
+        <p:nvPr/>
+      </p:nvGrpSpPr>
+      <p:grpSpPr>
+        <a:xfrm>
+          <a:off x="0" y="0"/>
+          <a:ext cx="0" cy="0"/>
+          <a:chOff x="0" y="0"/>
+          <a:chExt cx="0" cy="0"/>
+        </a:xfrm>
+      </p:grpSpPr>
+      <p:sp>
+        <p:nvSpPr>
+          <p:cNvPr id="2" name="Slide Image Placeholder 1"/>
+          <p:cNvSpPr>
+            <a:spLocks noGrp="1" noRot="1" noChangeAspect="1"/>
+          </p:cNvSpPr>
+          <p:nvPr>
+            <p:ph type="sldImg"/>
+          </p:nvPr>
+        </p:nvSpPr>
+        <p:spPr/>
+      </p:sp>
+      <p:sp>
+        <p:nvSpPr>
+          <p:cNvPr id="3" name="Notes Placeholder 2"/>
+          <p:cNvSpPr>
+            <a:spLocks noGrp="1"/>
+          </p:cNvSpPr>
+          <p:nvPr>
+            <p:ph type="body" idx="1"/>
+          </p:nvPr>
+        </p:nvSpPr>
+        <p:spPr/>
+        <p:txBody>
+          <a:bodyPr/>
+          <a:lstStyle/>
+          <a:p>
+            <a:r>
+              <a:rPr lang="en-US" dirty="0"/>
+              <a:t>Students copy their score-screen breakdown onto the worksheet, then rate themselves here.</a:t>
+            </a:r>
+            <a:endParaRPr lang="en-US" dirty="0"/>
+          </a:p>
+        </p:txBody>
+      </p:sp>
+      <p:sp>
+        <p:nvSpPr>
+          <p:cNvPr id="4" name="Slide Number Placeholder 3"/>
+          <p:cNvSpPr>
+            <a:spLocks noGrp="1"/>
+          </p:cNvSpPr>
+          <p:nvPr>
+            <p:ph type="sldNum" sz="quarter" idx="10"/>
+          </p:nvPr>
+        </p:nvSpPr>
+        <p:spPr/>
+        <p:txBody>
+          <a:bodyPr/>
+          <a:lstStyle/>
+          <a:p>
+            <a:fld id="{F7021451-1387-4CA6-816F-3879F97B5CBC}" type="slidenum">
+              <a:rPr lang="en-US"/>
+              <a:t>15</a:t>
             </a:fld>
             <a:endParaRPr lang="en-US"/>
           </a:p>
@@ -2949,12 +3045,12 @@
         </p:nvSpPr>
         <p:spPr>
           <a:xfrm>
-            <a:off x="502920" y="438912"/>
-            <a:ext cx="3108960" cy="502920"/>
+            <a:off x="502920" y="457200"/>
+            <a:ext cx="1051560" cy="420624"/>
           </a:xfrm>
           <a:prstGeom prst="roundRect">
             <a:avLst>
-              <a:gd name="adj" fmla="val 18182"/>
+              <a:gd name="adj" fmla="val 21739"/>
             </a:avLst>
           </a:prstGeom>
           <a:solidFill>
@@ -2971,8 +3067,8 @@
         </p:nvSpPr>
         <p:spPr>
           <a:xfrm>
-            <a:off x="502920" y="438912"/>
-            <a:ext cx="3108960" cy="502920"/>
+            <a:off x="502920" y="457200"/>
+            <a:ext cx="1051560" cy="420624"/>
           </a:xfrm>
           <a:prstGeom prst="rect">
             <a:avLst/>
@@ -2988,7 +3084,7 @@
               <a:buNone/>
             </a:pPr>
             <a:r>
-              <a:rPr lang="en-US" sz="1300" b="1" dirty="0">
+              <a:rPr lang="en-US" sz="1200" b="1" dirty="0">
                 <a:solidFill>
                   <a:srgbClr val="101828"/>
                 </a:solidFill>
@@ -2996,9 +3092,9 @@
                 <a:ea typeface="IBM Plex Mono" pitchFamily="34" charset="-122"/>
                 <a:cs typeface="IBM Plex Mono" pitchFamily="34" charset="-120"/>
               </a:rPr>
-              <a:t>★  FINAL CHALLENGE</a:t>
-            </a:r>
-            <a:endParaRPr lang="en-US" sz="1300" dirty="0"/>
+              <a:t>CHECK</a:t>
+            </a:r>
+            <a:endParaRPr lang="en-US" sz="1200" dirty="0"/>
           </a:p>
         </p:txBody>
       </p:sp>
@@ -3010,51 +3106,93 @@
         </p:nvSpPr>
         <p:spPr>
           <a:xfrm>
-            <a:off x="502920" y="1097280"/>
-            <a:ext cx="11155680" cy="731520"/>
-          </a:xfrm>
-          <a:prstGeom prst="rect">
-            <a:avLst/>
-          </a:prstGeom>
-          <a:noFill/>
-          <a:ln/>
-        </p:spPr>
-        <p:txBody>
-          <a:bodyPr wrap="square" lIns="0" tIns="0" rIns="0" bIns="0" rtlCol="0" anchor="ctr"/>
-          <a:lstStyle/>
-          <a:p>
-            <a:pPr indent="0" marL="0">
-              <a:buNone/>
-            </a:pPr>
-            <a:r>
-              <a:rPr lang="en-US" sz="3400" b="1" dirty="0">
-                <a:solidFill>
-                  <a:srgbClr val="101828"/>
+            <a:off x="1737360" y="457200"/>
+            <a:ext cx="9875520" cy="420624"/>
+          </a:xfrm>
+          <a:prstGeom prst="rect">
+            <a:avLst/>
+          </a:prstGeom>
+          <a:noFill/>
+          <a:ln/>
+        </p:spPr>
+        <p:txBody>
+          <a:bodyPr wrap="square" lIns="0" tIns="0" rIns="0" bIns="0" rtlCol="0" anchor="ctr"/>
+          <a:lstStyle/>
+          <a:p>
+            <a:pPr indent="0" marL="0">
+              <a:buNone/>
+            </a:pPr>
+            <a:r>
+              <a:rPr lang="en-US" sz="1500" dirty="0">
+                <a:solidFill>
+                  <a:srgbClr val="667085"/>
                 </a:solidFill>
                 <a:latin typeface="IBM Plex Sans" pitchFamily="34" charset="0"/>
                 <a:ea typeface="IBM Plex Sans" pitchFamily="34" charset="-122"/>
                 <a:cs typeface="IBM Plex Sans" pitchFamily="34" charset="-120"/>
               </a:rPr>
-              <a:t>What does it do?</a:t>
-            </a:r>
-            <a:endParaRPr lang="en-US" sz="3400" dirty="0"/>
-          </a:p>
-        </p:txBody>
-      </p:sp>
-      <p:sp>
-        <p:nvSpPr>
-          <p:cNvPr id="8" name="Shape 6"/>
+              <a:t>Hands down. Everyone commits.</a:t>
+            </a:r>
+            <a:endParaRPr lang="en-US" sz="1500" dirty="0"/>
+          </a:p>
+        </p:txBody>
+      </p:sp>
+      <p:sp>
+        <p:nvSpPr>
+          <p:cNvPr id="8" name="Text 6"/>
+          <p:cNvSpPr txBox="1"/>
+          <p:nvPr/>
+        </p:nvSpPr>
+        <p:spPr>
+          <a:xfrm>
+            <a:off x="502920" y="1097280"/>
+            <a:ext cx="11155680" cy="914400"/>
+          </a:xfrm>
+          <a:prstGeom prst="rect">
+            <a:avLst/>
+          </a:prstGeom>
+          <a:noFill/>
+          <a:ln/>
+        </p:spPr>
+        <p:txBody>
+          <a:bodyPr wrap="square" lIns="0" tIns="0" rIns="0" bIns="0" rtlCol="0" anchor="ctr"/>
+          <a:lstStyle/>
+          <a:p>
+            <a:pPr indent="0" marL="0">
+              <a:lnSpc>
+                <a:spcPct val="115000"/>
+              </a:lnSpc>
+              <a:buNone/>
+            </a:pPr>
+            <a:r>
+              <a:rPr lang="en-US" sz="2600" b="1" dirty="0">
+                <a:solidFill>
+                  <a:srgbClr val="101828"/>
+                </a:solidFill>
+                <a:latin typeface="IBM Plex Sans" pitchFamily="34" charset="0"/>
+                <a:ea typeface="IBM Plex Sans" pitchFamily="34" charset="-122"/>
+                <a:cs typeface="IBM Plex Sans" pitchFamily="34" charset="-120"/>
+              </a:rPr>
+              <a:t>What will this program display?</a:t>
+            </a:r>
+            <a:endParaRPr lang="en-US" sz="2600" dirty="0"/>
+          </a:p>
+        </p:txBody>
+      </p:sp>
+      <p:sp>
+        <p:nvSpPr>
+          <p:cNvPr id="9" name="Shape 7"/>
           <p:cNvSpPr/>
           <p:nvPr/>
         </p:nvSpPr>
         <p:spPr>
           <a:xfrm>
-            <a:off x="502920" y="2011680"/>
-            <a:ext cx="11155680" cy="2194560"/>
+            <a:off x="502920" y="2148840"/>
+            <a:ext cx="5029200" cy="1554480"/>
           </a:xfrm>
           <a:prstGeom prst="roundRect">
             <a:avLst>
-              <a:gd name="adj" fmla="val 5000"/>
+              <a:gd name="adj" fmla="val 7059"/>
             </a:avLst>
           </a:prstGeom>
           <a:solidFill>
@@ -3062,7 +3200,7 @@
           </a:solidFill>
           <a:ln w="15875">
             <a:solidFill>
-              <a:srgbClr val="2D63FF"/>
+              <a:srgbClr val="D9DEE7"/>
             </a:solidFill>
             <a:prstDash val="solid"/>
           </a:ln>
@@ -3070,33 +3208,223 @@
       </p:sp>
       <p:sp>
         <p:nvSpPr>
-          <p:cNvPr id="9" name="Text 7"/>
-          <p:cNvSpPr txBox="1"/>
-          <p:nvPr/>
-        </p:nvSpPr>
-        <p:spPr>
-          <a:xfrm>
-            <a:off x="1005840" y="2331720"/>
-            <a:ext cx="10149840" cy="1554480"/>
-          </a:xfrm>
-          <a:prstGeom prst="rect">
-            <a:avLst/>
-          </a:prstGeom>
-          <a:noFill/>
-          <a:ln/>
-        </p:spPr>
-        <p:txBody>
-          <a:bodyPr wrap="square" lIns="0" tIns="0" rIns="0" bIns="0" rtlCol="0" anchor="ctr"/>
+          <p:cNvPr id="10" name="Text 8"/>
+          <p:cNvSpPr txBox="1"/>
+          <p:nvPr/>
+        </p:nvSpPr>
+        <p:spPr>
+          <a:xfrm>
+            <a:off x="822960" y="2350008"/>
+            <a:ext cx="4480560" cy="1152144"/>
+          </a:xfrm>
+          <a:prstGeom prst="rect">
+            <a:avLst/>
+          </a:prstGeom>
+          <a:noFill/>
+          <a:ln/>
+        </p:spPr>
+        <p:txBody>
+          <a:bodyPr wrap="square" lIns="0" tIns="0" rIns="0" bIns="0" rtlCol="0" anchor="t"/>
           <a:lstStyle/>
           <a:p>
             <a:pPr indent="0" marL="0">
               <a:lnSpc>
-                <a:spcPct val="130000"/>
+                <a:spcPct val="125000"/>
               </a:lnSpc>
               <a:buNone/>
             </a:pPr>
             <a:r>
-              <a:rPr lang="en-US" sz="2200" dirty="0">
+              <a:rPr lang="en-US" sz="1500" dirty="0">
+                <a:solidFill>
+                  <a:srgbClr val="101828"/>
+                </a:solidFill>
+                <a:latin typeface="IBM Plex Mono" pitchFamily="34" charset="0"/>
+                <a:ea typeface="IBM Plex Mono" pitchFamily="34" charset="-122"/>
+                <a:cs typeface="IBM Plex Mono" pitchFamily="34" charset="-120"/>
+              </a:rPr>
+              <a:t>pets = ["cat", "dog"]</a:t>
+            </a:r>
+            <a:endParaRPr lang="en-US" sz="1500" dirty="0"/>
+          </a:p>
+          <a:p>
+            <a:pPr indent="0" marL="0">
+              <a:lnSpc>
+                <a:spcPct val="125000"/>
+              </a:lnSpc>
+              <a:buNone/>
+            </a:pPr>
+            <a:r>
+              <a:rPr lang="en-US" sz="1500" dirty="0">
+                <a:solidFill>
+                  <a:srgbClr val="101828"/>
+                </a:solidFill>
+                <a:latin typeface="IBM Plex Mono" pitchFamily="34" charset="0"/>
+                <a:ea typeface="IBM Plex Mono" pitchFamily="34" charset="-122"/>
+                <a:cs typeface="IBM Plex Mono" pitchFamily="34" charset="-120"/>
+              </a:rPr>
+              <a:t>pets.append("ant")</a:t>
+            </a:r>
+            <a:endParaRPr lang="en-US" sz="1500" dirty="0"/>
+          </a:p>
+          <a:p>
+            <a:pPr indent="0" marL="0">
+              <a:lnSpc>
+                <a:spcPct val="125000"/>
+              </a:lnSpc>
+              <a:buNone/>
+            </a:pPr>
+            <a:r>
+              <a:rPr lang="en-US" sz="1500" dirty="0">
+                <a:solidFill>
+                  <a:srgbClr val="101828"/>
+                </a:solidFill>
+                <a:latin typeface="IBM Plex Mono" pitchFamily="34" charset="0"/>
+                <a:ea typeface="IBM Plex Mono" pitchFamily="34" charset="-122"/>
+                <a:cs typeface="IBM Plex Mono" pitchFamily="34" charset="-120"/>
+              </a:rPr>
+              <a:t>print(pets)</a:t>
+            </a:r>
+            <a:endParaRPr lang="en-US" sz="1500" dirty="0"/>
+          </a:p>
+          <a:p>
+            <a:pPr indent="0" marL="0">
+              <a:lnSpc>
+                <a:spcPct val="125000"/>
+              </a:lnSpc>
+              <a:buNone/>
+            </a:pPr>
+            <a:r>
+              <a:rPr lang="en-US" sz="1500" dirty="0">
+                <a:solidFill>
+                  <a:srgbClr val="101828"/>
+                </a:solidFill>
+                <a:latin typeface="IBM Plex Mono" pitchFamily="34" charset="0"/>
+                <a:ea typeface="IBM Plex Mono" pitchFamily="34" charset="-122"/>
+                <a:cs typeface="IBM Plex Mono" pitchFamily="34" charset="-120"/>
+              </a:rPr>
+              <a:t>print(len(pets))</a:t>
+            </a:r>
+            <a:endParaRPr lang="en-US" sz="1500" dirty="0"/>
+          </a:p>
+        </p:txBody>
+      </p:sp>
+      <p:sp>
+        <p:nvSpPr>
+          <p:cNvPr id="11" name="Shape 9"/>
+          <p:cNvSpPr/>
+          <p:nvPr/>
+        </p:nvSpPr>
+        <p:spPr>
+          <a:xfrm>
+            <a:off x="5806440" y="2148840"/>
+            <a:ext cx="5852160" cy="731520"/>
+          </a:xfrm>
+          <a:prstGeom prst="roundRect">
+            <a:avLst>
+              <a:gd name="adj" fmla="val 15000"/>
+            </a:avLst>
+          </a:prstGeom>
+          <a:solidFill>
+            <a:srgbClr val="FFFFFF"/>
+          </a:solidFill>
+          <a:ln w="15875">
+            <a:solidFill>
+              <a:srgbClr val="D9DEE7"/>
+            </a:solidFill>
+            <a:prstDash val="solid"/>
+          </a:ln>
+        </p:spPr>
+      </p:sp>
+      <p:sp>
+        <p:nvSpPr>
+          <p:cNvPr id="12" name="Shape 10"/>
+          <p:cNvSpPr/>
+          <p:nvPr/>
+        </p:nvSpPr>
+        <p:spPr>
+          <a:xfrm>
+            <a:off x="6080760" y="2295144"/>
+            <a:ext cx="438912" cy="438912"/>
+          </a:xfrm>
+          <a:prstGeom prst="roundRect">
+            <a:avLst>
+              <a:gd name="adj" fmla="val 20833"/>
+            </a:avLst>
+          </a:prstGeom>
+          <a:solidFill>
+            <a:srgbClr val="EEF2FB"/>
+          </a:solidFill>
+          <a:ln/>
+        </p:spPr>
+      </p:sp>
+      <p:sp>
+        <p:nvSpPr>
+          <p:cNvPr id="13" name="Text 11"/>
+          <p:cNvSpPr txBox="1"/>
+          <p:nvPr/>
+        </p:nvSpPr>
+        <p:spPr>
+          <a:xfrm>
+            <a:off x="6080760" y="2295144"/>
+            <a:ext cx="438912" cy="438912"/>
+          </a:xfrm>
+          <a:prstGeom prst="rect">
+            <a:avLst/>
+          </a:prstGeom>
+          <a:noFill/>
+          <a:ln/>
+        </p:spPr>
+        <p:txBody>
+          <a:bodyPr wrap="square" lIns="0" tIns="0" rIns="0" bIns="0" rtlCol="0" anchor="ctr"/>
+          <a:lstStyle/>
+          <a:p>
+            <a:pPr algn="ctr" indent="0" marL="0">
+              <a:buNone/>
+            </a:pPr>
+            <a:r>
+              <a:rPr lang="en-US" sz="1300" b="1" dirty="0">
+                <a:solidFill>
+                  <a:srgbClr val="2D63FF"/>
+                </a:solidFill>
+                <a:latin typeface="IBM Plex Mono" pitchFamily="34" charset="0"/>
+                <a:ea typeface="IBM Plex Mono" pitchFamily="34" charset="-122"/>
+                <a:cs typeface="IBM Plex Mono" pitchFamily="34" charset="-120"/>
+              </a:rPr>
+              <a:t>A</a:t>
+            </a:r>
+            <a:endParaRPr lang="en-US" sz="1300" dirty="0"/>
+          </a:p>
+        </p:txBody>
+      </p:sp>
+      <p:sp>
+        <p:nvSpPr>
+          <p:cNvPr id="14" name="Text 12"/>
+          <p:cNvSpPr txBox="1"/>
+          <p:nvPr/>
+        </p:nvSpPr>
+        <p:spPr>
+          <a:xfrm>
+            <a:off x="6720840" y="2148840"/>
+            <a:ext cx="4754880" cy="731520"/>
+          </a:xfrm>
+          <a:prstGeom prst="rect">
+            <a:avLst/>
+          </a:prstGeom>
+          <a:noFill/>
+          <a:ln/>
+        </p:spPr>
+        <p:txBody>
+          <a:bodyPr wrap="square" lIns="0" tIns="0" rIns="0" bIns="0" rtlCol="0" anchor="ctr"/>
+          <a:lstStyle/>
+          <a:p>
+            <a:pPr indent="0" marL="0">
+              <a:lnSpc>
+                <a:spcPct val="115000"/>
+              </a:lnSpc>
+              <a:buNone/>
+            </a:pPr>
+            <a:r>
+              <a:rPr lang="en-US" sz="1700" dirty="0">
                 <a:solidFill>
                   <a:srgbClr val="101828"/>
                 </a:solidFill>
@@ -3104,48 +3432,329 @@
                 <a:ea typeface="IBM Plex Sans" pitchFamily="34" charset="-122"/>
                 <a:cs typeface="IBM Plex Sans" pitchFamily="34" charset="-120"/>
               </a:rPr>
-              <a:t>A list called basket holds ["tea", "jam", "rice"]. Tap the star and match each list operation to what it does.</a:t>
-            </a:r>
-            <a:endParaRPr lang="en-US" sz="2200" dirty="0"/>
-          </a:p>
-        </p:txBody>
-      </p:sp>
-      <p:sp>
-        <p:nvSpPr>
-          <p:cNvPr id="10" name="Text 8"/>
-          <p:cNvSpPr txBox="1"/>
-          <p:nvPr/>
-        </p:nvSpPr>
-        <p:spPr>
-          <a:xfrm>
-            <a:off x="502920" y="4526280"/>
-            <a:ext cx="11155680" cy="457200"/>
-          </a:xfrm>
-          <a:prstGeom prst="rect">
-            <a:avLst/>
-          </a:prstGeom>
-          <a:noFill/>
-          <a:ln/>
-        </p:spPr>
-        <p:txBody>
-          <a:bodyPr wrap="square" lIns="0" tIns="0" rIns="0" bIns="0" rtlCol="0" anchor="ctr"/>
-          <a:lstStyle/>
-          <a:p>
-            <a:pPr indent="0" marL="0">
-              <a:buNone/>
-            </a:pPr>
-            <a:r>
-              <a:rPr lang="en-US" sz="1600" dirty="0">
-                <a:solidFill>
-                  <a:srgbClr val="667085"/>
+              <a:t>['cat', 'dog']</a:t>
+            </a:r>
+            <a:endParaRPr lang="en-US" sz="1700" dirty="0"/>
+          </a:p>
+          <a:p>
+            <a:pPr indent="0" marL="0">
+              <a:lnSpc>
+                <a:spcPct val="115000"/>
+              </a:lnSpc>
+              <a:buNone/>
+            </a:pPr>
+            <a:r>
+              <a:rPr lang="en-US" sz="1700" dirty="0">
+                <a:solidFill>
+                  <a:srgbClr val="101828"/>
                 </a:solidFill>
                 <a:latin typeface="IBM Plex Sans" pitchFamily="34" charset="0"/>
                 <a:ea typeface="IBM Plex Sans" pitchFamily="34" charset="-122"/>
                 <a:cs typeface="IBM Plex Sans" pitchFamily="34" charset="-120"/>
               </a:rPr>
-              <a:t>Predict on paper first, then look down and test it.</a:t>
-            </a:r>
-            <a:endParaRPr lang="en-US" sz="1600" dirty="0"/>
+              <a:t>2</a:t>
+            </a:r>
+            <a:endParaRPr lang="en-US" sz="1700" dirty="0"/>
+          </a:p>
+        </p:txBody>
+      </p:sp>
+      <p:sp>
+        <p:nvSpPr>
+          <p:cNvPr id="15" name="Shape 13"/>
+          <p:cNvSpPr/>
+          <p:nvPr/>
+        </p:nvSpPr>
+        <p:spPr>
+          <a:xfrm>
+            <a:off x="5806440" y="3017520"/>
+            <a:ext cx="5852160" cy="731520"/>
+          </a:xfrm>
+          <a:prstGeom prst="roundRect">
+            <a:avLst>
+              <a:gd name="adj" fmla="val 15000"/>
+            </a:avLst>
+          </a:prstGeom>
+          <a:solidFill>
+            <a:srgbClr val="FFFFFF"/>
+          </a:solidFill>
+          <a:ln w="15875">
+            <a:solidFill>
+              <a:srgbClr val="D9DEE7"/>
+            </a:solidFill>
+            <a:prstDash val="solid"/>
+          </a:ln>
+        </p:spPr>
+      </p:sp>
+      <p:sp>
+        <p:nvSpPr>
+          <p:cNvPr id="16" name="Shape 14"/>
+          <p:cNvSpPr/>
+          <p:nvPr/>
+        </p:nvSpPr>
+        <p:spPr>
+          <a:xfrm>
+            <a:off x="6080760" y="3163824"/>
+            <a:ext cx="438912" cy="438912"/>
+          </a:xfrm>
+          <a:prstGeom prst="roundRect">
+            <a:avLst>
+              <a:gd name="adj" fmla="val 20833"/>
+            </a:avLst>
+          </a:prstGeom>
+          <a:solidFill>
+            <a:srgbClr val="EEF2FB"/>
+          </a:solidFill>
+          <a:ln/>
+        </p:spPr>
+      </p:sp>
+      <p:sp>
+        <p:nvSpPr>
+          <p:cNvPr id="17" name="Text 15"/>
+          <p:cNvSpPr txBox="1"/>
+          <p:nvPr/>
+        </p:nvSpPr>
+        <p:spPr>
+          <a:xfrm>
+            <a:off x="6080760" y="3163824"/>
+            <a:ext cx="438912" cy="438912"/>
+          </a:xfrm>
+          <a:prstGeom prst="rect">
+            <a:avLst/>
+          </a:prstGeom>
+          <a:noFill/>
+          <a:ln/>
+        </p:spPr>
+        <p:txBody>
+          <a:bodyPr wrap="square" lIns="0" tIns="0" rIns="0" bIns="0" rtlCol="0" anchor="ctr"/>
+          <a:lstStyle/>
+          <a:p>
+            <a:pPr algn="ctr" indent="0" marL="0">
+              <a:buNone/>
+            </a:pPr>
+            <a:r>
+              <a:rPr lang="en-US" sz="1300" b="1" dirty="0">
+                <a:solidFill>
+                  <a:srgbClr val="2D63FF"/>
+                </a:solidFill>
+                <a:latin typeface="IBM Plex Mono" pitchFamily="34" charset="0"/>
+                <a:ea typeface="IBM Plex Mono" pitchFamily="34" charset="-122"/>
+                <a:cs typeface="IBM Plex Mono" pitchFamily="34" charset="-120"/>
+              </a:rPr>
+              <a:t>B</a:t>
+            </a:r>
+            <a:endParaRPr lang="en-US" sz="1300" dirty="0"/>
+          </a:p>
+        </p:txBody>
+      </p:sp>
+      <p:sp>
+        <p:nvSpPr>
+          <p:cNvPr id="18" name="Text 16"/>
+          <p:cNvSpPr txBox="1"/>
+          <p:nvPr/>
+        </p:nvSpPr>
+        <p:spPr>
+          <a:xfrm>
+            <a:off x="6720840" y="3017520"/>
+            <a:ext cx="4754880" cy="731520"/>
+          </a:xfrm>
+          <a:prstGeom prst="rect">
+            <a:avLst/>
+          </a:prstGeom>
+          <a:noFill/>
+          <a:ln/>
+        </p:spPr>
+        <p:txBody>
+          <a:bodyPr wrap="square" lIns="0" tIns="0" rIns="0" bIns="0" rtlCol="0" anchor="ctr"/>
+          <a:lstStyle/>
+          <a:p>
+            <a:pPr indent="0" marL="0">
+              <a:lnSpc>
+                <a:spcPct val="115000"/>
+              </a:lnSpc>
+              <a:buNone/>
+            </a:pPr>
+            <a:r>
+              <a:rPr lang="en-US" sz="1700" dirty="0">
+                <a:solidFill>
+                  <a:srgbClr val="101828"/>
+                </a:solidFill>
+                <a:latin typeface="IBM Plex Sans" pitchFamily="34" charset="0"/>
+                <a:ea typeface="IBM Plex Sans" pitchFamily="34" charset="-122"/>
+                <a:cs typeface="IBM Plex Sans" pitchFamily="34" charset="-120"/>
+              </a:rPr>
+              <a:t>['cat', 'dog', 'ant']</a:t>
+            </a:r>
+            <a:endParaRPr lang="en-US" sz="1700" dirty="0"/>
+          </a:p>
+          <a:p>
+            <a:pPr indent="0" marL="0">
+              <a:lnSpc>
+                <a:spcPct val="115000"/>
+              </a:lnSpc>
+              <a:buNone/>
+            </a:pPr>
+            <a:r>
+              <a:rPr lang="en-US" sz="1700" dirty="0">
+                <a:solidFill>
+                  <a:srgbClr val="101828"/>
+                </a:solidFill>
+                <a:latin typeface="IBM Plex Sans" pitchFamily="34" charset="0"/>
+                <a:ea typeface="IBM Plex Sans" pitchFamily="34" charset="-122"/>
+                <a:cs typeface="IBM Plex Sans" pitchFamily="34" charset="-120"/>
+              </a:rPr>
+              <a:t>3</a:t>
+            </a:r>
+            <a:endParaRPr lang="en-US" sz="1700" dirty="0"/>
+          </a:p>
+        </p:txBody>
+      </p:sp>
+      <p:sp>
+        <p:nvSpPr>
+          <p:cNvPr id="19" name="Shape 17"/>
+          <p:cNvSpPr/>
+          <p:nvPr/>
+        </p:nvSpPr>
+        <p:spPr>
+          <a:xfrm>
+            <a:off x="5806440" y="3886200"/>
+            <a:ext cx="5852160" cy="731520"/>
+          </a:xfrm>
+          <a:prstGeom prst="roundRect">
+            <a:avLst>
+              <a:gd name="adj" fmla="val 15000"/>
+            </a:avLst>
+          </a:prstGeom>
+          <a:solidFill>
+            <a:srgbClr val="FFFFFF"/>
+          </a:solidFill>
+          <a:ln w="15875">
+            <a:solidFill>
+              <a:srgbClr val="D9DEE7"/>
+            </a:solidFill>
+            <a:prstDash val="solid"/>
+          </a:ln>
+        </p:spPr>
+      </p:sp>
+      <p:sp>
+        <p:nvSpPr>
+          <p:cNvPr id="20" name="Shape 18"/>
+          <p:cNvSpPr/>
+          <p:nvPr/>
+        </p:nvSpPr>
+        <p:spPr>
+          <a:xfrm>
+            <a:off x="6080760" y="4032504"/>
+            <a:ext cx="438912" cy="438912"/>
+          </a:xfrm>
+          <a:prstGeom prst="roundRect">
+            <a:avLst>
+              <a:gd name="adj" fmla="val 20833"/>
+            </a:avLst>
+          </a:prstGeom>
+          <a:solidFill>
+            <a:srgbClr val="EEF2FB"/>
+          </a:solidFill>
+          <a:ln/>
+        </p:spPr>
+      </p:sp>
+      <p:sp>
+        <p:nvSpPr>
+          <p:cNvPr id="21" name="Text 19"/>
+          <p:cNvSpPr txBox="1"/>
+          <p:nvPr/>
+        </p:nvSpPr>
+        <p:spPr>
+          <a:xfrm>
+            <a:off x="6080760" y="4032504"/>
+            <a:ext cx="438912" cy="438912"/>
+          </a:xfrm>
+          <a:prstGeom prst="rect">
+            <a:avLst/>
+          </a:prstGeom>
+          <a:noFill/>
+          <a:ln/>
+        </p:spPr>
+        <p:txBody>
+          <a:bodyPr wrap="square" lIns="0" tIns="0" rIns="0" bIns="0" rtlCol="0" anchor="ctr"/>
+          <a:lstStyle/>
+          <a:p>
+            <a:pPr algn="ctr" indent="0" marL="0">
+              <a:buNone/>
+            </a:pPr>
+            <a:r>
+              <a:rPr lang="en-US" sz="1300" b="1" dirty="0">
+                <a:solidFill>
+                  <a:srgbClr val="2D63FF"/>
+                </a:solidFill>
+                <a:latin typeface="IBM Plex Mono" pitchFamily="34" charset="0"/>
+                <a:ea typeface="IBM Plex Mono" pitchFamily="34" charset="-122"/>
+                <a:cs typeface="IBM Plex Mono" pitchFamily="34" charset="-120"/>
+              </a:rPr>
+              <a:t>C</a:t>
+            </a:r>
+            <a:endParaRPr lang="en-US" sz="1300" dirty="0"/>
+          </a:p>
+        </p:txBody>
+      </p:sp>
+      <p:sp>
+        <p:nvSpPr>
+          <p:cNvPr id="22" name="Text 20"/>
+          <p:cNvSpPr txBox="1"/>
+          <p:nvPr/>
+        </p:nvSpPr>
+        <p:spPr>
+          <a:xfrm>
+            <a:off x="6720840" y="3886200"/>
+            <a:ext cx="4754880" cy="731520"/>
+          </a:xfrm>
+          <a:prstGeom prst="rect">
+            <a:avLst/>
+          </a:prstGeom>
+          <a:noFill/>
+          <a:ln/>
+        </p:spPr>
+        <p:txBody>
+          <a:bodyPr wrap="square" lIns="0" tIns="0" rIns="0" bIns="0" rtlCol="0" anchor="ctr"/>
+          <a:lstStyle/>
+          <a:p>
+            <a:pPr indent="0" marL="0">
+              <a:lnSpc>
+                <a:spcPct val="115000"/>
+              </a:lnSpc>
+              <a:buNone/>
+            </a:pPr>
+            <a:r>
+              <a:rPr lang="en-US" sz="1700" dirty="0">
+                <a:solidFill>
+                  <a:srgbClr val="101828"/>
+                </a:solidFill>
+                <a:latin typeface="IBM Plex Sans" pitchFamily="34" charset="0"/>
+                <a:ea typeface="IBM Plex Sans" pitchFamily="34" charset="-122"/>
+                <a:cs typeface="IBM Plex Sans" pitchFamily="34" charset="-120"/>
+              </a:rPr>
+              <a:t>['ant', 'cat', 'dog']</a:t>
+            </a:r>
+            <a:endParaRPr lang="en-US" sz="1700" dirty="0"/>
+          </a:p>
+          <a:p>
+            <a:pPr indent="0" marL="0">
+              <a:lnSpc>
+                <a:spcPct val="115000"/>
+              </a:lnSpc>
+              <a:buNone/>
+            </a:pPr>
+            <a:r>
+              <a:rPr lang="en-US" sz="1700" dirty="0">
+                <a:solidFill>
+                  <a:srgbClr val="101828"/>
+                </a:solidFill>
+                <a:latin typeface="IBM Plex Sans" pitchFamily="34" charset="0"/>
+                <a:ea typeface="IBM Plex Sans" pitchFamily="34" charset="-122"/>
+                <a:cs typeface="IBM Plex Sans" pitchFamily="34" charset="-120"/>
+              </a:rPr>
+              <a:t>3</a:t>
+            </a:r>
+            <a:endParaRPr lang="en-US" sz="1700" dirty="0"/>
           </a:p>
         </p:txBody>
       </p:sp>
@@ -3281,30 +3890,91 @@
       </p:sp>
       <p:sp>
         <p:nvSpPr>
-          <p:cNvPr id="5" name="Text 3"/>
-          <p:cNvSpPr txBox="1"/>
-          <p:nvPr/>
-        </p:nvSpPr>
-        <p:spPr>
-          <a:xfrm>
-            <a:off x="502920" y="411480"/>
-            <a:ext cx="11155680" cy="777240"/>
-          </a:xfrm>
-          <a:prstGeom prst="rect">
-            <a:avLst/>
-          </a:prstGeom>
-          <a:noFill/>
-          <a:ln/>
-        </p:spPr>
-        <p:txBody>
-          <a:bodyPr wrap="square" lIns="0" tIns="0" rIns="0" bIns="0" rtlCol="0" anchor="ctr"/>
-          <a:lstStyle/>
-          <a:p>
-            <a:pPr indent="0" marL="0">
-              <a:buNone/>
-            </a:pPr>
-            <a:r>
-              <a:rPr lang="en-US" sz="3200" b="1" dirty="0">
+          <p:cNvPr id="5" name="Shape 3"/>
+          <p:cNvSpPr/>
+          <p:nvPr/>
+        </p:nvSpPr>
+        <p:spPr>
+          <a:xfrm>
+            <a:off x="502920" y="438912"/>
+            <a:ext cx="3108960" cy="502920"/>
+          </a:xfrm>
+          <a:prstGeom prst="roundRect">
+            <a:avLst>
+              <a:gd name="adj" fmla="val 18182"/>
+            </a:avLst>
+          </a:prstGeom>
+          <a:solidFill>
+            <a:srgbClr val="F4B942"/>
+          </a:solidFill>
+          <a:ln/>
+        </p:spPr>
+      </p:sp>
+      <p:sp>
+        <p:nvSpPr>
+          <p:cNvPr id="6" name="Text 4"/>
+          <p:cNvSpPr txBox="1"/>
+          <p:nvPr/>
+        </p:nvSpPr>
+        <p:spPr>
+          <a:xfrm>
+            <a:off x="502920" y="438912"/>
+            <a:ext cx="3108960" cy="502920"/>
+          </a:xfrm>
+          <a:prstGeom prst="rect">
+            <a:avLst/>
+          </a:prstGeom>
+          <a:noFill/>
+          <a:ln/>
+        </p:spPr>
+        <p:txBody>
+          <a:bodyPr wrap="square" lIns="0" tIns="0" rIns="0" bIns="0" rtlCol="0" anchor="ctr"/>
+          <a:lstStyle/>
+          <a:p>
+            <a:pPr algn="ctr" indent="0" marL="0">
+              <a:buNone/>
+            </a:pPr>
+            <a:r>
+              <a:rPr lang="en-US" sz="1300" b="1" dirty="0">
+                <a:solidFill>
+                  <a:srgbClr val="101828"/>
+                </a:solidFill>
+                <a:latin typeface="IBM Plex Mono" pitchFamily="34" charset="0"/>
+                <a:ea typeface="IBM Plex Mono" pitchFamily="34" charset="-122"/>
+                <a:cs typeface="IBM Plex Mono" pitchFamily="34" charset="-120"/>
+              </a:rPr>
+              <a:t>★  FINAL CHALLENGE</a:t>
+            </a:r>
+            <a:endParaRPr lang="en-US" sz="1300" dirty="0"/>
+          </a:p>
+        </p:txBody>
+      </p:sp>
+      <p:sp>
+        <p:nvSpPr>
+          <p:cNvPr id="7" name="Text 5"/>
+          <p:cNvSpPr txBox="1"/>
+          <p:nvPr/>
+        </p:nvSpPr>
+        <p:spPr>
+          <a:xfrm>
+            <a:off x="502920" y="1097280"/>
+            <a:ext cx="11155680" cy="731520"/>
+          </a:xfrm>
+          <a:prstGeom prst="rect">
+            <a:avLst/>
+          </a:prstGeom>
+          <a:noFill/>
+          <a:ln/>
+        </p:spPr>
+        <p:txBody>
+          <a:bodyPr wrap="square" lIns="0" tIns="0" rIns="0" bIns="0" rtlCol="0" anchor="ctr"/>
+          <a:lstStyle/>
+          <a:p>
+            <a:pPr indent="0" marL="0">
+              <a:buNone/>
+            </a:pPr>
+            <a:r>
+              <a:rPr lang="en-US" sz="3400" b="1" dirty="0">
                 <a:solidFill>
                   <a:srgbClr val="101828"/>
                 </a:solidFill>
@@ -3312,65 +3982,26 @@
                 <a:ea typeface="IBM Plex Sans" pitchFamily="34" charset="-122"/>
                 <a:cs typeface="IBM Plex Sans" pitchFamily="34" charset="-120"/>
               </a:rPr>
-              <a:t>Worth knowing</a:t>
-            </a:r>
-            <a:endParaRPr lang="en-US" sz="3200" dirty="0"/>
-          </a:p>
-        </p:txBody>
-      </p:sp>
-      <p:sp>
-        <p:nvSpPr>
-          <p:cNvPr id="6" name="Text 4"/>
-          <p:cNvSpPr txBox="1"/>
-          <p:nvPr/>
-        </p:nvSpPr>
-        <p:spPr>
-          <a:xfrm>
-            <a:off x="502920" y="1170432"/>
-            <a:ext cx="11155680" cy="411480"/>
-          </a:xfrm>
-          <a:prstGeom prst="rect">
-            <a:avLst/>
-          </a:prstGeom>
-          <a:noFill/>
-          <a:ln/>
-        </p:spPr>
-        <p:txBody>
-          <a:bodyPr wrap="square" lIns="0" tIns="0" rIns="0" bIns="0" rtlCol="0" anchor="ctr"/>
-          <a:lstStyle/>
-          <a:p>
-            <a:pPr indent="0" marL="0">
-              <a:buNone/>
-            </a:pPr>
-            <a:r>
-              <a:rPr lang="en-US" sz="1500" dirty="0">
-                <a:solidFill>
-                  <a:srgbClr val="667085"/>
-                </a:solidFill>
-                <a:latin typeface="IBM Plex Sans" pitchFamily="34" charset="0"/>
-                <a:ea typeface="IBM Plex Sans" pitchFamily="34" charset="-122"/>
-                <a:cs typeface="IBM Plex Sans" pitchFamily="34" charset="-120"/>
-              </a:rPr>
-              <a:t>The information markers dotted around the room</a:t>
-            </a:r>
-            <a:endParaRPr lang="en-US" sz="1500" dirty="0"/>
-          </a:p>
-        </p:txBody>
-      </p:sp>
-      <p:sp>
-        <p:nvSpPr>
-          <p:cNvPr id="7" name="Shape 5"/>
+              <a:t>What does it do?</a:t>
+            </a:r>
+            <a:endParaRPr lang="en-US" sz="3400" dirty="0"/>
+          </a:p>
+        </p:txBody>
+      </p:sp>
+      <p:sp>
+        <p:nvSpPr>
+          <p:cNvPr id="8" name="Shape 6"/>
           <p:cNvSpPr/>
           <p:nvPr/>
         </p:nvSpPr>
         <p:spPr>
           <a:xfrm>
-            <a:off x="502920" y="1828800"/>
-            <a:ext cx="5394960" cy="1737360"/>
+            <a:off x="502920" y="2011680"/>
+            <a:ext cx="11155680" cy="2194560"/>
           </a:xfrm>
           <a:prstGeom prst="roundRect">
             <a:avLst>
-              <a:gd name="adj" fmla="val 6316"/>
+              <a:gd name="adj" fmla="val 5000"/>
             </a:avLst>
           </a:prstGeom>
           <a:solidFill>
@@ -3386,72 +4017,72 @@
       </p:sp>
       <p:sp>
         <p:nvSpPr>
-          <p:cNvPr id="8" name="Text 6"/>
-          <p:cNvSpPr txBox="1"/>
-          <p:nvPr/>
-        </p:nvSpPr>
-        <p:spPr>
-          <a:xfrm>
-            <a:off x="822960" y="2011680"/>
-            <a:ext cx="4754880" cy="365760"/>
-          </a:xfrm>
-          <a:prstGeom prst="rect">
-            <a:avLst/>
-          </a:prstGeom>
-          <a:noFill/>
-          <a:ln/>
-        </p:spPr>
-        <p:txBody>
-          <a:bodyPr wrap="square" lIns="0" tIns="0" rIns="0" bIns="0" rtlCol="0" anchor="ctr"/>
-          <a:lstStyle/>
-          <a:p>
-            <a:pPr indent="0" marL="0">
-              <a:buNone/>
-            </a:pPr>
-            <a:r>
-              <a:rPr lang="en-US" sz="1600" b="1" dirty="0">
-                <a:solidFill>
-                  <a:srgbClr val="2D63FF"/>
+          <p:cNvPr id="9" name="Text 7"/>
+          <p:cNvSpPr txBox="1"/>
+          <p:nvPr/>
+        </p:nvSpPr>
+        <p:spPr>
+          <a:xfrm>
+            <a:off x="1005840" y="2331720"/>
+            <a:ext cx="10149840" cy="1554480"/>
+          </a:xfrm>
+          <a:prstGeom prst="rect">
+            <a:avLst/>
+          </a:prstGeom>
+          <a:noFill/>
+          <a:ln/>
+        </p:spPr>
+        <p:txBody>
+          <a:bodyPr wrap="square" lIns="0" tIns="0" rIns="0" bIns="0" rtlCol="0" anchor="ctr"/>
+          <a:lstStyle/>
+          <a:p>
+            <a:pPr indent="0" marL="0">
+              <a:lnSpc>
+                <a:spcPct val="130000"/>
+              </a:lnSpc>
+              <a:buNone/>
+            </a:pPr>
+            <a:r>
+              <a:rPr lang="en-US" sz="2200" dirty="0">
+                <a:solidFill>
+                  <a:srgbClr val="101828"/>
                 </a:solidFill>
                 <a:latin typeface="IBM Plex Sans" pitchFamily="34" charset="0"/>
                 <a:ea typeface="IBM Plex Sans" pitchFamily="34" charset="-122"/>
                 <a:cs typeface="IBM Plex Sans" pitchFamily="34" charset="-120"/>
               </a:rPr>
-              <a:t>One name, many values</a:t>
-            </a:r>
-            <a:endParaRPr lang="en-US" sz="1600" dirty="0"/>
-          </a:p>
-        </p:txBody>
-      </p:sp>
-      <p:sp>
-        <p:nvSpPr>
-          <p:cNvPr id="9" name="Text 7"/>
-          <p:cNvSpPr txBox="1"/>
-          <p:nvPr/>
-        </p:nvSpPr>
-        <p:spPr>
-          <a:xfrm>
-            <a:off x="822960" y="2395728"/>
-            <a:ext cx="4754880" cy="1005840"/>
-          </a:xfrm>
-          <a:prstGeom prst="rect">
-            <a:avLst/>
-          </a:prstGeom>
-          <a:noFill/>
-          <a:ln/>
-        </p:spPr>
-        <p:txBody>
-          <a:bodyPr wrap="square" lIns="0" tIns="0" rIns="0" bIns="0" rtlCol="0" anchor="t"/>
-          <a:lstStyle/>
-          <a:p>
-            <a:pPr indent="0" marL="0">
-              <a:lnSpc>
-                <a:spcPct val="120000"/>
-              </a:lnSpc>
-              <a:buNone/>
-            </a:pPr>
-            <a:r>
-              <a:rPr lang="en-US" sz="1300" dirty="0">
+              <a:t>A list called basket holds ["tea", "jam", "rice"]. Tap the star and match each list operation to what it does.</a:t>
+            </a:r>
+            <a:endParaRPr lang="en-US" sz="2200" dirty="0"/>
+          </a:p>
+        </p:txBody>
+      </p:sp>
+      <p:sp>
+        <p:nvSpPr>
+          <p:cNvPr id="10" name="Text 8"/>
+          <p:cNvSpPr txBox="1"/>
+          <p:nvPr/>
+        </p:nvSpPr>
+        <p:spPr>
+          <a:xfrm>
+            <a:off x="502920" y="4526280"/>
+            <a:ext cx="11155680" cy="457200"/>
+          </a:xfrm>
+          <a:prstGeom prst="rect">
+            <a:avLst/>
+          </a:prstGeom>
+          <a:noFill/>
+          <a:ln/>
+        </p:spPr>
+        <p:txBody>
+          <a:bodyPr wrap="square" lIns="0" tIns="0" rIns="0" bIns="0" rtlCol="0" anchor="ctr"/>
+          <a:lstStyle/>
+          <a:p>
+            <a:pPr indent="0" marL="0">
+              <a:buNone/>
+            </a:pPr>
+            <a:r>
+              <a:rPr lang="en-US" sz="1600" dirty="0">
                 <a:solidFill>
                   <a:srgbClr val="667085"/>
                 </a:solidFill>
@@ -3459,333 +4090,9 @@
                 <a:ea typeface="IBM Plex Sans" pitchFamily="34" charset="-122"/>
                 <a:cs typeface="IBM Plex Sans" pitchFamily="34" charset="-120"/>
               </a:rPr>
-              <a:t>Without lists, a program for 30 marks would need 30 variables - and 30 lines to total them.</a:t>
-            </a:r>
-            <a:endParaRPr lang="en-US" sz="1300" dirty="0"/>
-          </a:p>
-        </p:txBody>
-      </p:sp>
-      <p:sp>
-        <p:nvSpPr>
-          <p:cNvPr id="10" name="Shape 8"/>
-          <p:cNvSpPr/>
-          <p:nvPr/>
-        </p:nvSpPr>
-        <p:spPr>
-          <a:xfrm>
-            <a:off x="6217920" y="1828800"/>
-            <a:ext cx="5394960" cy="1737360"/>
-          </a:xfrm>
-          <a:prstGeom prst="roundRect">
-            <a:avLst>
-              <a:gd name="adj" fmla="val 6316"/>
-            </a:avLst>
-          </a:prstGeom>
-          <a:solidFill>
-            <a:srgbClr val="FFFFFF"/>
-          </a:solidFill>
-          <a:ln w="15875">
-            <a:solidFill>
-              <a:srgbClr val="08A6A6"/>
-            </a:solidFill>
-            <a:prstDash val="solid"/>
-          </a:ln>
-        </p:spPr>
-      </p:sp>
-      <p:sp>
-        <p:nvSpPr>
-          <p:cNvPr id="11" name="Text 9"/>
-          <p:cNvSpPr txBox="1"/>
-          <p:nvPr/>
-        </p:nvSpPr>
-        <p:spPr>
-          <a:xfrm>
-            <a:off x="6537960" y="2011680"/>
-            <a:ext cx="4754880" cy="365760"/>
-          </a:xfrm>
-          <a:prstGeom prst="rect">
-            <a:avLst/>
-          </a:prstGeom>
-          <a:noFill/>
-          <a:ln/>
-        </p:spPr>
-        <p:txBody>
-          <a:bodyPr wrap="square" lIns="0" tIns="0" rIns="0" bIns="0" rtlCol="0" anchor="ctr"/>
-          <a:lstStyle/>
-          <a:p>
-            <a:pPr indent="0" marL="0">
-              <a:buNone/>
-            </a:pPr>
-            <a:r>
-              <a:rPr lang="en-US" sz="1600" b="1" dirty="0">
-                <a:solidFill>
-                  <a:srgbClr val="08A6A6"/>
-                </a:solidFill>
-                <a:latin typeface="IBM Plex Sans" pitchFamily="34" charset="0"/>
-                <a:ea typeface="IBM Plex Sans" pitchFamily="34" charset="-122"/>
-                <a:cs typeface="IBM Plex Sans" pitchFamily="34" charset="-120"/>
-              </a:rPr>
-              <a:t>Out of range</a:t>
+              <a:t>Predict on paper first, then look down and test it.</a:t>
             </a:r>
             <a:endParaRPr lang="en-US" sz="1600" dirty="0"/>
-          </a:p>
-        </p:txBody>
-      </p:sp>
-      <p:sp>
-        <p:nvSpPr>
-          <p:cNvPr id="12" name="Text 10"/>
-          <p:cNvSpPr txBox="1"/>
-          <p:nvPr/>
-        </p:nvSpPr>
-        <p:spPr>
-          <a:xfrm>
-            <a:off x="6537960" y="2395728"/>
-            <a:ext cx="4754880" cy="1005840"/>
-          </a:xfrm>
-          <a:prstGeom prst="rect">
-            <a:avLst/>
-          </a:prstGeom>
-          <a:noFill/>
-          <a:ln/>
-        </p:spPr>
-        <p:txBody>
-          <a:bodyPr wrap="square" lIns="0" tIns="0" rIns="0" bIns="0" rtlCol="0" anchor="t"/>
-          <a:lstStyle/>
-          <a:p>
-            <a:pPr indent="0" marL="0">
-              <a:lnSpc>
-                <a:spcPct val="120000"/>
-              </a:lnSpc>
-              <a:buNone/>
-            </a:pPr>
-            <a:r>
-              <a:rPr lang="en-US" sz="1300" dirty="0">
-                <a:solidFill>
-                  <a:srgbClr val="667085"/>
-                </a:solidFill>
-                <a:latin typeface="IBM Plex Sans" pitchFamily="34" charset="0"/>
-                <a:ea typeface="IBM Plex Sans" pitchFamily="34" charset="-122"/>
-                <a:cs typeface="IBM Plex Sans" pitchFamily="34" charset="-120"/>
-              </a:rPr>
-              <a:t>An index error is nearly always an off-by-one: the last index of a list of 7 is 6, not 7.</a:t>
-            </a:r>
-            <a:endParaRPr lang="en-US" sz="1300" dirty="0"/>
-          </a:p>
-        </p:txBody>
-      </p:sp>
-      <p:sp>
-        <p:nvSpPr>
-          <p:cNvPr id="13" name="Shape 11"/>
-          <p:cNvSpPr/>
-          <p:nvPr/>
-        </p:nvSpPr>
-        <p:spPr>
-          <a:xfrm>
-            <a:off x="502920" y="3794760"/>
-            <a:ext cx="5394960" cy="1737360"/>
-          </a:xfrm>
-          <a:prstGeom prst="roundRect">
-            <a:avLst>
-              <a:gd name="adj" fmla="val 6316"/>
-            </a:avLst>
-          </a:prstGeom>
-          <a:solidFill>
-            <a:srgbClr val="FFFFFF"/>
-          </a:solidFill>
-          <a:ln w="15875">
-            <a:solidFill>
-              <a:srgbClr val="2D63FF"/>
-            </a:solidFill>
-            <a:prstDash val="solid"/>
-          </a:ln>
-        </p:spPr>
-      </p:sp>
-      <p:sp>
-        <p:nvSpPr>
-          <p:cNvPr id="14" name="Text 12"/>
-          <p:cNvSpPr txBox="1"/>
-          <p:nvPr/>
-        </p:nvSpPr>
-        <p:spPr>
-          <a:xfrm>
-            <a:off x="822960" y="3977640"/>
-            <a:ext cx="4754880" cy="365760"/>
-          </a:xfrm>
-          <a:prstGeom prst="rect">
-            <a:avLst/>
-          </a:prstGeom>
-          <a:noFill/>
-          <a:ln/>
-        </p:spPr>
-        <p:txBody>
-          <a:bodyPr wrap="square" lIns="0" tIns="0" rIns="0" bIns="0" rtlCol="0" anchor="ctr"/>
-          <a:lstStyle/>
-          <a:p>
-            <a:pPr indent="0" marL="0">
-              <a:buNone/>
-            </a:pPr>
-            <a:r>
-              <a:rPr lang="en-US" sz="1600" b="1" dirty="0">
-                <a:solidFill>
-                  <a:srgbClr val="2D63FF"/>
-                </a:solidFill>
-                <a:latin typeface="IBM Plex Sans" pitchFamily="34" charset="0"/>
-                <a:ea typeface="IBM Plex Sans" pitchFamily="34" charset="-122"/>
-                <a:cs typeface="IBM Plex Sans" pitchFamily="34" charset="-120"/>
-              </a:rPr>
-              <a:t>Which loop</a:t>
-            </a:r>
-            <a:endParaRPr lang="en-US" sz="1600" dirty="0"/>
-          </a:p>
-        </p:txBody>
-      </p:sp>
-      <p:sp>
-        <p:nvSpPr>
-          <p:cNvPr id="15" name="Text 13"/>
-          <p:cNvSpPr txBox="1"/>
-          <p:nvPr/>
-        </p:nvSpPr>
-        <p:spPr>
-          <a:xfrm>
-            <a:off x="822960" y="4361688"/>
-            <a:ext cx="4754880" cy="1005840"/>
-          </a:xfrm>
-          <a:prstGeom prst="rect">
-            <a:avLst/>
-          </a:prstGeom>
-          <a:noFill/>
-          <a:ln/>
-        </p:spPr>
-        <p:txBody>
-          <a:bodyPr wrap="square" lIns="0" tIns="0" rIns="0" bIns="0" rtlCol="0" anchor="t"/>
-          <a:lstStyle/>
-          <a:p>
-            <a:pPr indent="0" marL="0">
-              <a:lnSpc>
-                <a:spcPct val="120000"/>
-              </a:lnSpc>
-              <a:buNone/>
-            </a:pPr>
-            <a:r>
-              <a:rPr lang="en-US" sz="1300" dirty="0">
-                <a:solidFill>
-                  <a:srgbClr val="667085"/>
-                </a:solidFill>
-                <a:latin typeface="IBM Plex Sans" pitchFamily="34" charset="0"/>
-                <a:ea typeface="IBM Plex Sans" pitchFamily="34" charset="-122"/>
-                <a:cs typeface="IBM Plex Sans" pitchFamily="34" charset="-120"/>
-              </a:rPr>
-              <a:t>for item in list is tidier when you only need the values. Use range(len(list)) when you need the position too.</a:t>
-            </a:r>
-            <a:endParaRPr lang="en-US" sz="1300" dirty="0"/>
-          </a:p>
-        </p:txBody>
-      </p:sp>
-      <p:sp>
-        <p:nvSpPr>
-          <p:cNvPr id="16" name="Shape 14"/>
-          <p:cNvSpPr/>
-          <p:nvPr/>
-        </p:nvSpPr>
-        <p:spPr>
-          <a:xfrm>
-            <a:off x="6217920" y="3794760"/>
-            <a:ext cx="5394960" cy="1737360"/>
-          </a:xfrm>
-          <a:prstGeom prst="roundRect">
-            <a:avLst>
-              <a:gd name="adj" fmla="val 6316"/>
-            </a:avLst>
-          </a:prstGeom>
-          <a:solidFill>
-            <a:srgbClr val="FFFFFF"/>
-          </a:solidFill>
-          <a:ln w="15875">
-            <a:solidFill>
-              <a:srgbClr val="08A6A6"/>
-            </a:solidFill>
-            <a:prstDash val="solid"/>
-          </a:ln>
-        </p:spPr>
-      </p:sp>
-      <p:sp>
-        <p:nvSpPr>
-          <p:cNvPr id="17" name="Text 15"/>
-          <p:cNvSpPr txBox="1"/>
-          <p:nvPr/>
-        </p:nvSpPr>
-        <p:spPr>
-          <a:xfrm>
-            <a:off x="6537960" y="3977640"/>
-            <a:ext cx="4754880" cy="365760"/>
-          </a:xfrm>
-          <a:prstGeom prst="rect">
-            <a:avLst/>
-          </a:prstGeom>
-          <a:noFill/>
-          <a:ln/>
-        </p:spPr>
-        <p:txBody>
-          <a:bodyPr wrap="square" lIns="0" tIns="0" rIns="0" bIns="0" rtlCol="0" anchor="ctr"/>
-          <a:lstStyle/>
-          <a:p>
-            <a:pPr indent="0" marL="0">
-              <a:buNone/>
-            </a:pPr>
-            <a:r>
-              <a:rPr lang="en-US" sz="1600" b="1" dirty="0">
-                <a:solidFill>
-                  <a:srgbClr val="08A6A6"/>
-                </a:solidFill>
-                <a:latin typeface="IBM Plex Sans" pitchFamily="34" charset="0"/>
-                <a:ea typeface="IBM Plex Sans" pitchFamily="34" charset="-122"/>
-                <a:cs typeface="IBM Plex Sans" pitchFamily="34" charset="-120"/>
-              </a:rPr>
-              <a:t>Removing safely</a:t>
-            </a:r>
-            <a:endParaRPr lang="en-US" sz="1600" dirty="0"/>
-          </a:p>
-        </p:txBody>
-      </p:sp>
-      <p:sp>
-        <p:nvSpPr>
-          <p:cNvPr id="18" name="Text 16"/>
-          <p:cNvSpPr txBox="1"/>
-          <p:nvPr/>
-        </p:nvSpPr>
-        <p:spPr>
-          <a:xfrm>
-            <a:off x="6537960" y="4361688"/>
-            <a:ext cx="4754880" cy="1005840"/>
-          </a:xfrm>
-          <a:prstGeom prst="rect">
-            <a:avLst/>
-          </a:prstGeom>
-          <a:noFill/>
-          <a:ln/>
-        </p:spPr>
-        <p:txBody>
-          <a:bodyPr wrap="square" lIns="0" tIns="0" rIns="0" bIns="0" rtlCol="0" anchor="t"/>
-          <a:lstStyle/>
-          <a:p>
-            <a:pPr indent="0" marL="0">
-              <a:lnSpc>
-                <a:spcPct val="120000"/>
-              </a:lnSpc>
-              <a:buNone/>
-            </a:pPr>
-            <a:r>
-              <a:rPr lang="en-US" sz="1300" dirty="0">
-                <a:solidFill>
-                  <a:srgbClr val="667085"/>
-                </a:solidFill>
-                <a:latin typeface="IBM Plex Sans" pitchFamily="34" charset="0"/>
-                <a:ea typeface="IBM Plex Sans" pitchFamily="34" charset="-122"/>
-                <a:cs typeface="IBM Plex Sans" pitchFamily="34" charset="-120"/>
-              </a:rPr>
-              <a:t>Deleting from a list while looping over it makes the loop skip items. Build a new list instead.</a:t>
-            </a:r>
-            <a:endParaRPr lang="en-US" sz="1300" dirty="0"/>
           </a:p>
         </p:txBody>
       </p:sp>
@@ -3952,7 +4259,7 @@
                 <a:ea typeface="IBM Plex Sans" pitchFamily="34" charset="-122"/>
                 <a:cs typeface="IBM Plex Sans" pitchFamily="34" charset="-120"/>
               </a:rPr>
-              <a:t>Exam practice</a:t>
+              <a:t>Worth knowing</a:t>
             </a:r>
             <a:endParaRPr lang="en-US" sz="3200" dirty="0"/>
           </a:p>
@@ -3991,7 +4298,7 @@
                 <a:ea typeface="IBM Plex Sans" pitchFamily="34" charset="-122"/>
                 <a:cs typeface="IBM Plex Sans" pitchFamily="34" charset="-120"/>
               </a:rPr>
-              <a:t>Devices away. Answer from memory on the worksheet.</a:t>
+              <a:t>The information markers dotted around the room</a:t>
             </a:r>
             <a:endParaRPr lang="en-US" sz="1500" dirty="0"/>
           </a:p>
@@ -4006,11 +4313,11 @@
         <p:spPr>
           <a:xfrm>
             <a:off x="502920" y="1828800"/>
-            <a:ext cx="11155680" cy="1097280"/>
+            <a:ext cx="5394960" cy="1737360"/>
           </a:xfrm>
           <a:prstGeom prst="roundRect">
             <a:avLst>
-              <a:gd name="adj" fmla="val 10000"/>
+              <a:gd name="adj" fmla="val 6316"/>
             </a:avLst>
           </a:prstGeom>
           <a:solidFill>
@@ -4018,7 +4325,7 @@
           </a:solidFill>
           <a:ln w="15875">
             <a:solidFill>
-              <a:srgbClr val="D9DEE7"/>
+              <a:srgbClr val="2D63FF"/>
             </a:solidFill>
             <a:prstDash val="solid"/>
           </a:ln>
@@ -4032,353 +4339,93 @@
         </p:nvSpPr>
         <p:spPr>
           <a:xfrm>
-            <a:off x="914400" y="1938528"/>
-            <a:ext cx="9418320" cy="877824"/>
-          </a:xfrm>
-          <a:prstGeom prst="rect">
-            <a:avLst/>
-          </a:prstGeom>
-          <a:noFill/>
-          <a:ln/>
-        </p:spPr>
-        <p:txBody>
-          <a:bodyPr wrap="square" lIns="0" tIns="0" rIns="0" bIns="0" rtlCol="0" anchor="ctr"/>
-          <a:lstStyle/>
-          <a:p>
-            <a:pPr indent="0" marL="0">
-              <a:lnSpc>
-                <a:spcPct val="118000"/>
-              </a:lnSpc>
-              <a:buNone/>
-            </a:pPr>
-            <a:r>
-              <a:rPr lang="en-US" sz="1700" dirty="0">
-                <a:solidFill>
-                  <a:srgbClr val="101828"/>
+            <a:off x="822960" y="2011680"/>
+            <a:ext cx="4754880" cy="365760"/>
+          </a:xfrm>
+          <a:prstGeom prst="rect">
+            <a:avLst/>
+          </a:prstGeom>
+          <a:noFill/>
+          <a:ln/>
+        </p:spPr>
+        <p:txBody>
+          <a:bodyPr wrap="square" lIns="0" tIns="0" rIns="0" bIns="0" rtlCol="0" anchor="ctr"/>
+          <a:lstStyle/>
+          <a:p>
+            <a:pPr indent="0" marL="0">
+              <a:buNone/>
+            </a:pPr>
+            <a:r>
+              <a:rPr lang="en-US" sz="1600" b="1" dirty="0">
+                <a:solidFill>
+                  <a:srgbClr val="2D63FF"/>
                 </a:solidFill>
                 <a:latin typeface="IBM Plex Sans" pitchFamily="34" charset="0"/>
                 <a:ea typeface="IBM Plex Sans" pitchFamily="34" charset="-122"/>
                 <a:cs typeface="IBM Plex Sans" pitchFamily="34" charset="-120"/>
               </a:rPr>
-              <a:t>A loop over a list of six numbers begins </a:t>
-            </a:r>
+              <a:t>One name, many values</a:t>
+            </a:r>
+            <a:endParaRPr lang="en-US" sz="1600" dirty="0"/>
+          </a:p>
+        </p:txBody>
+      </p:sp>
+      <p:sp>
+        <p:nvSpPr>
+          <p:cNvPr id="9" name="Text 7"/>
+          <p:cNvSpPr txBox="1"/>
+          <p:nvPr/>
+        </p:nvSpPr>
+        <p:spPr>
+          <a:xfrm>
+            <a:off x="822960" y="2395728"/>
+            <a:ext cx="4754880" cy="1005840"/>
+          </a:xfrm>
+          <a:prstGeom prst="rect">
+            <a:avLst/>
+          </a:prstGeom>
+          <a:noFill/>
+          <a:ln/>
+        </p:spPr>
+        <p:txBody>
+          <a:bodyPr wrap="square" lIns="0" tIns="0" rIns="0" bIns="0" rtlCol="0" anchor="t"/>
+          <a:lstStyle/>
+          <a:p>
             <a:pPr indent="0" marL="0">
               <a:lnSpc>
-                <a:spcPct val="118000"/>
+                <a:spcPct val="120000"/>
               </a:lnSpc>
               <a:buNone/>
             </a:pPr>
             <a:r>
-              <a:rPr lang="en-US" sz="1700" dirty="0">
-                <a:solidFill>
-                  <a:srgbClr val="6B21A8"/>
-                </a:solidFill>
-                <a:latin typeface="IBM Plex Mono" pitchFamily="34" charset="0"/>
-                <a:ea typeface="IBM Plex Mono" pitchFamily="34" charset="-122"/>
-                <a:cs typeface="IBM Plex Mono" pitchFamily="34" charset="-120"/>
-              </a:rPr>
-              <a:t>for</a:t>
-            </a:r>
-            <a:pPr indent="0" marL="0">
-              <a:lnSpc>
-                <a:spcPct val="118000"/>
-              </a:lnSpc>
-              <a:buNone/>
-            </a:pPr>
-            <a:r>
-              <a:rPr lang="en-US" sz="1700" dirty="0">
-                <a:solidFill>
-                  <a:srgbClr val="18181B"/>
-                </a:solidFill>
-                <a:latin typeface="IBM Plex Mono" pitchFamily="34" charset="0"/>
-                <a:ea typeface="IBM Plex Mono" pitchFamily="34" charset="-122"/>
-                <a:cs typeface="IBM Plex Mono" pitchFamily="34" charset="-120"/>
-              </a:rPr>
-              <a:t> </a:t>
-            </a:r>
-            <a:pPr indent="0" marL="0">
-              <a:lnSpc>
-                <a:spcPct val="118000"/>
-              </a:lnSpc>
-              <a:buNone/>
-            </a:pPr>
-            <a:r>
-              <a:rPr lang="en-US" sz="1700" dirty="0">
-                <a:solidFill>
-                  <a:srgbClr val="18181B"/>
-                </a:solidFill>
-                <a:latin typeface="IBM Plex Mono" pitchFamily="34" charset="0"/>
-                <a:ea typeface="IBM Plex Mono" pitchFamily="34" charset="-122"/>
-                <a:cs typeface="IBM Plex Mono" pitchFamily="34" charset="-120"/>
-              </a:rPr>
-              <a:t>i</a:t>
-            </a:r>
-            <a:pPr indent="0" marL="0">
-              <a:lnSpc>
-                <a:spcPct val="118000"/>
-              </a:lnSpc>
-              <a:buNone/>
-            </a:pPr>
-            <a:r>
-              <a:rPr lang="en-US" sz="1700" dirty="0">
-                <a:solidFill>
-                  <a:srgbClr val="18181B"/>
-                </a:solidFill>
-                <a:latin typeface="IBM Plex Mono" pitchFamily="34" charset="0"/>
-                <a:ea typeface="IBM Plex Mono" pitchFamily="34" charset="-122"/>
-                <a:cs typeface="IBM Plex Mono" pitchFamily="34" charset="-120"/>
-              </a:rPr>
-              <a:t> </a:t>
-            </a:r>
-            <a:pPr indent="0" marL="0">
-              <a:lnSpc>
-                <a:spcPct val="118000"/>
-              </a:lnSpc>
-              <a:buNone/>
-            </a:pPr>
-            <a:r>
-              <a:rPr lang="en-US" sz="1700" dirty="0">
-                <a:solidFill>
-                  <a:srgbClr val="6B21A8"/>
-                </a:solidFill>
-                <a:latin typeface="IBM Plex Mono" pitchFamily="34" charset="0"/>
-                <a:ea typeface="IBM Plex Mono" pitchFamily="34" charset="-122"/>
-                <a:cs typeface="IBM Plex Mono" pitchFamily="34" charset="-120"/>
-              </a:rPr>
-              <a:t>in</a:t>
-            </a:r>
-            <a:pPr indent="0" marL="0">
-              <a:lnSpc>
-                <a:spcPct val="118000"/>
-              </a:lnSpc>
-              <a:buNone/>
-            </a:pPr>
-            <a:r>
-              <a:rPr lang="en-US" sz="1700" dirty="0">
-                <a:solidFill>
-                  <a:srgbClr val="18181B"/>
-                </a:solidFill>
-                <a:latin typeface="IBM Plex Mono" pitchFamily="34" charset="0"/>
-                <a:ea typeface="IBM Plex Mono" pitchFamily="34" charset="-122"/>
-                <a:cs typeface="IBM Plex Mono" pitchFamily="34" charset="-120"/>
-              </a:rPr>
-              <a:t> </a:t>
-            </a:r>
-            <a:pPr indent="0" marL="0">
-              <a:lnSpc>
-                <a:spcPct val="118000"/>
-              </a:lnSpc>
-              <a:buNone/>
-            </a:pPr>
-            <a:r>
-              <a:rPr lang="en-US" sz="1700" dirty="0">
-                <a:solidFill>
-                  <a:srgbClr val="1D4ED8"/>
-                </a:solidFill>
-                <a:latin typeface="IBM Plex Mono" pitchFamily="34" charset="0"/>
-                <a:ea typeface="IBM Plex Mono" pitchFamily="34" charset="-122"/>
-                <a:cs typeface="IBM Plex Mono" pitchFamily="34" charset="-120"/>
-              </a:rPr>
-              <a:t>range</a:t>
-            </a:r>
-            <a:pPr indent="0" marL="0">
-              <a:lnSpc>
-                <a:spcPct val="118000"/>
-              </a:lnSpc>
-              <a:buNone/>
-            </a:pPr>
-            <a:r>
-              <a:rPr lang="en-US" sz="1700" dirty="0">
-                <a:solidFill>
-                  <a:srgbClr val="3F3F46"/>
-                </a:solidFill>
-                <a:latin typeface="IBM Plex Mono" pitchFamily="34" charset="0"/>
-                <a:ea typeface="IBM Plex Mono" pitchFamily="34" charset="-122"/>
-                <a:cs typeface="IBM Plex Mono" pitchFamily="34" charset="-120"/>
-              </a:rPr>
-              <a:t>(</a:t>
-            </a:r>
-            <a:pPr indent="0" marL="0">
-              <a:lnSpc>
-                <a:spcPct val="118000"/>
-              </a:lnSpc>
-              <a:buNone/>
-            </a:pPr>
-            <a:r>
-              <a:rPr lang="en-US" sz="1700" dirty="0">
-                <a:solidFill>
-                  <a:srgbClr val="9A3412"/>
-                </a:solidFill>
-                <a:latin typeface="IBM Plex Mono" pitchFamily="34" charset="0"/>
-                <a:ea typeface="IBM Plex Mono" pitchFamily="34" charset="-122"/>
-                <a:cs typeface="IBM Plex Mono" pitchFamily="34" charset="-120"/>
-              </a:rPr>
-              <a:t>1</a:t>
-            </a:r>
-            <a:pPr indent="0" marL="0">
-              <a:lnSpc>
-                <a:spcPct val="118000"/>
-              </a:lnSpc>
-              <a:buNone/>
-            </a:pPr>
-            <a:r>
-              <a:rPr lang="en-US" sz="1700" dirty="0">
-                <a:solidFill>
-                  <a:srgbClr val="3F3F46"/>
-                </a:solidFill>
-                <a:latin typeface="IBM Plex Mono" pitchFamily="34" charset="0"/>
-                <a:ea typeface="IBM Plex Mono" pitchFamily="34" charset="-122"/>
-                <a:cs typeface="IBM Plex Mono" pitchFamily="34" charset="-120"/>
-              </a:rPr>
-              <a:t>,</a:t>
-            </a:r>
-            <a:pPr indent="0" marL="0">
-              <a:lnSpc>
-                <a:spcPct val="118000"/>
-              </a:lnSpc>
-              <a:buNone/>
-            </a:pPr>
-            <a:r>
-              <a:rPr lang="en-US" sz="1700" dirty="0">
-                <a:solidFill>
-                  <a:srgbClr val="18181B"/>
-                </a:solidFill>
-                <a:latin typeface="IBM Plex Mono" pitchFamily="34" charset="0"/>
-                <a:ea typeface="IBM Plex Mono" pitchFamily="34" charset="-122"/>
-                <a:cs typeface="IBM Plex Mono" pitchFamily="34" charset="-120"/>
-              </a:rPr>
-              <a:t> </a:t>
-            </a:r>
-            <a:pPr indent="0" marL="0">
-              <a:lnSpc>
-                <a:spcPct val="118000"/>
-              </a:lnSpc>
-              <a:buNone/>
-            </a:pPr>
-            <a:r>
-              <a:rPr lang="en-US" sz="1700" dirty="0">
-                <a:solidFill>
-                  <a:srgbClr val="9A3412"/>
-                </a:solidFill>
-                <a:latin typeface="IBM Plex Mono" pitchFamily="34" charset="0"/>
-                <a:ea typeface="IBM Plex Mono" pitchFamily="34" charset="-122"/>
-                <a:cs typeface="IBM Plex Mono" pitchFamily="34" charset="-120"/>
-              </a:rPr>
-              <a:t>6</a:t>
-            </a:r>
-            <a:pPr indent="0" marL="0">
-              <a:lnSpc>
-                <a:spcPct val="118000"/>
-              </a:lnSpc>
-              <a:buNone/>
-            </a:pPr>
-            <a:r>
-              <a:rPr lang="en-US" sz="1700" dirty="0">
-                <a:solidFill>
-                  <a:srgbClr val="3F3F46"/>
-                </a:solidFill>
-                <a:latin typeface="IBM Plex Mono" pitchFamily="34" charset="0"/>
-                <a:ea typeface="IBM Plex Mono" pitchFamily="34" charset="-122"/>
-                <a:cs typeface="IBM Plex Mono" pitchFamily="34" charset="-120"/>
-              </a:rPr>
-              <a:t>)</a:t>
-            </a:r>
-            <a:pPr indent="0" marL="0">
-              <a:lnSpc>
-                <a:spcPct val="118000"/>
-              </a:lnSpc>
-              <a:buNone/>
-            </a:pPr>
-            <a:r>
-              <a:rPr lang="en-US" sz="1700" dirty="0">
-                <a:solidFill>
-                  <a:srgbClr val="101828"/>
+              <a:rPr lang="en-US" sz="1300" dirty="0">
+                <a:solidFill>
+                  <a:srgbClr val="667085"/>
                 </a:solidFill>
                 <a:latin typeface="IBM Plex Sans" pitchFamily="34" charset="0"/>
                 <a:ea typeface="IBM Plex Sans" pitchFamily="34" charset="-122"/>
                 <a:cs typeface="IBM Plex Sans" pitchFamily="34" charset="-120"/>
               </a:rPr>
-              <a:t>. State which item is never looked at, and rewrite the line so that every item is included.</a:t>
-            </a:r>
-            <a:endParaRPr lang="en-US" sz="1700" dirty="0"/>
-          </a:p>
-        </p:txBody>
-      </p:sp>
-      <p:sp>
-        <p:nvSpPr>
-          <p:cNvPr id="9" name="Shape 7"/>
+              <a:t>Without lists, a program for 30 marks would need 30 variables - and 30 lines to total them.</a:t>
+            </a:r>
+            <a:endParaRPr lang="en-US" sz="1300" dirty="0"/>
+          </a:p>
+        </p:txBody>
+      </p:sp>
+      <p:sp>
+        <p:nvSpPr>
+          <p:cNvPr id="10" name="Shape 8"/>
           <p:cNvSpPr/>
           <p:nvPr/>
         </p:nvSpPr>
         <p:spPr>
           <a:xfrm>
-            <a:off x="10515600" y="2130552"/>
-            <a:ext cx="868680" cy="493776"/>
+            <a:off x="6217920" y="1828800"/>
+            <a:ext cx="5394960" cy="1737360"/>
           </a:xfrm>
           <a:prstGeom prst="roundRect">
             <a:avLst>
-              <a:gd name="adj" fmla="val 18519"/>
-            </a:avLst>
-          </a:prstGeom>
-          <a:solidFill>
-            <a:srgbClr val="EEF2FB"/>
-          </a:solidFill>
-          <a:ln/>
-        </p:spPr>
-      </p:sp>
-      <p:sp>
-        <p:nvSpPr>
-          <p:cNvPr id="10" name="Text 8"/>
-          <p:cNvSpPr txBox="1"/>
-          <p:nvPr/>
-        </p:nvSpPr>
-        <p:spPr>
-          <a:xfrm>
-            <a:off x="10515600" y="2130552"/>
-            <a:ext cx="868680" cy="493776"/>
-          </a:xfrm>
-          <a:prstGeom prst="rect">
-            <a:avLst/>
-          </a:prstGeom>
-          <a:noFill/>
-          <a:ln/>
-        </p:spPr>
-        <p:txBody>
-          <a:bodyPr wrap="square" lIns="0" tIns="0" rIns="0" bIns="0" rtlCol="0" anchor="ctr"/>
-          <a:lstStyle/>
-          <a:p>
-            <a:pPr algn="ctr" indent="0" marL="0">
-              <a:buNone/>
-            </a:pPr>
-            <a:r>
-              <a:rPr lang="en-US" sz="1500" b="1" dirty="0">
-                <a:solidFill>
-                  <a:srgbClr val="2D63FF"/>
-                </a:solidFill>
-                <a:latin typeface="IBM Plex Mono" pitchFamily="34" charset="0"/>
-                <a:ea typeface="IBM Plex Mono" pitchFamily="34" charset="-122"/>
-                <a:cs typeface="IBM Plex Mono" pitchFamily="34" charset="-120"/>
-              </a:rPr>
-              <a:t>[2]</a:t>
-            </a:r>
-            <a:endParaRPr lang="en-US" sz="1500" dirty="0"/>
-          </a:p>
-        </p:txBody>
-      </p:sp>
-      <p:sp>
-        <p:nvSpPr>
-          <p:cNvPr id="11" name="Shape 9"/>
-          <p:cNvSpPr/>
-          <p:nvPr/>
-        </p:nvSpPr>
-        <p:spPr>
-          <a:xfrm>
-            <a:off x="502920" y="3127248"/>
-            <a:ext cx="11155680" cy="1097280"/>
-          </a:xfrm>
-          <a:prstGeom prst="roundRect">
-            <a:avLst>
-              <a:gd name="adj" fmla="val 10000"/>
+              <a:gd name="adj" fmla="val 6316"/>
             </a:avLst>
           </a:prstGeom>
           <a:solidFill>
@@ -4386,7 +4433,7 @@
           </a:solidFill>
           <a:ln w="15875">
             <a:solidFill>
-              <a:srgbClr val="D9DEE7"/>
+              <a:srgbClr val="08A6A6"/>
             </a:solidFill>
             <a:prstDash val="solid"/>
           </a:ln>
@@ -4394,111 +4441,82 @@
       </p:sp>
       <p:sp>
         <p:nvSpPr>
-          <p:cNvPr id="12" name="Text 10"/>
-          <p:cNvSpPr txBox="1"/>
-          <p:nvPr/>
-        </p:nvSpPr>
-        <p:spPr>
-          <a:xfrm>
-            <a:off x="914400" y="3236976"/>
-            <a:ext cx="9418320" cy="877824"/>
-          </a:xfrm>
-          <a:prstGeom prst="rect">
-            <a:avLst/>
-          </a:prstGeom>
-          <a:noFill/>
-          <a:ln/>
-        </p:spPr>
-        <p:txBody>
-          <a:bodyPr wrap="square" lIns="0" tIns="0" rIns="0" bIns="0" rtlCol="0" anchor="ctr"/>
-          <a:lstStyle/>
-          <a:p>
-            <a:pPr indent="0" marL="0">
-              <a:lnSpc>
-                <a:spcPct val="118000"/>
-              </a:lnSpc>
-              <a:buNone/>
-            </a:pPr>
-            <a:r>
-              <a:rPr lang="en-US" sz="1700" dirty="0">
-                <a:solidFill>
-                  <a:srgbClr val="101828"/>
+          <p:cNvPr id="11" name="Text 9"/>
+          <p:cNvSpPr txBox="1"/>
+          <p:nvPr/>
+        </p:nvSpPr>
+        <p:spPr>
+          <a:xfrm>
+            <a:off x="6537960" y="2011680"/>
+            <a:ext cx="4754880" cy="365760"/>
+          </a:xfrm>
+          <a:prstGeom prst="rect">
+            <a:avLst/>
+          </a:prstGeom>
+          <a:noFill/>
+          <a:ln/>
+        </p:spPr>
+        <p:txBody>
+          <a:bodyPr wrap="square" lIns="0" tIns="0" rIns="0" bIns="0" rtlCol="0" anchor="ctr"/>
+          <a:lstStyle/>
+          <a:p>
+            <a:pPr indent="0" marL="0">
+              <a:buNone/>
+            </a:pPr>
+            <a:r>
+              <a:rPr lang="en-US" sz="1600" b="1" dirty="0">
+                <a:solidFill>
+                  <a:srgbClr val="08A6A6"/>
                 </a:solidFill>
                 <a:latin typeface="IBM Plex Sans" pitchFamily="34" charset="0"/>
                 <a:ea typeface="IBM Plex Sans" pitchFamily="34" charset="-122"/>
                 <a:cs typeface="IBM Plex Sans" pitchFamily="34" charset="-120"/>
               </a:rPr>
-              <a:t>Write a program that reads seven whole numbers into a list, then prints the largest and the position it is stored at, without using </a:t>
-            </a:r>
+              <a:t>Out of range</a:t>
+            </a:r>
+            <a:endParaRPr lang="en-US" sz="1600" dirty="0"/>
+          </a:p>
+        </p:txBody>
+      </p:sp>
+      <p:sp>
+        <p:nvSpPr>
+          <p:cNvPr id="12" name="Text 10"/>
+          <p:cNvSpPr txBox="1"/>
+          <p:nvPr/>
+        </p:nvSpPr>
+        <p:spPr>
+          <a:xfrm>
+            <a:off x="6537960" y="2395728"/>
+            <a:ext cx="4754880" cy="1005840"/>
+          </a:xfrm>
+          <a:prstGeom prst="rect">
+            <a:avLst/>
+          </a:prstGeom>
+          <a:noFill/>
+          <a:ln/>
+        </p:spPr>
+        <p:txBody>
+          <a:bodyPr wrap="square" lIns="0" tIns="0" rIns="0" bIns="0" rtlCol="0" anchor="t"/>
+          <a:lstStyle/>
+          <a:p>
             <a:pPr indent="0" marL="0">
               <a:lnSpc>
-                <a:spcPct val="118000"/>
+                <a:spcPct val="120000"/>
               </a:lnSpc>
               <a:buNone/>
             </a:pPr>
             <a:r>
-              <a:rPr lang="en-US" sz="1700" dirty="0">
-                <a:solidFill>
-                  <a:srgbClr val="1D4ED8"/>
-                </a:solidFill>
-                <a:latin typeface="IBM Plex Mono" pitchFamily="34" charset="0"/>
-                <a:ea typeface="IBM Plex Mono" pitchFamily="34" charset="-122"/>
-                <a:cs typeface="IBM Plex Mono" pitchFamily="34" charset="-120"/>
-              </a:rPr>
-              <a:t>max</a:t>
-            </a:r>
-            <a:pPr indent="0" marL="0">
-              <a:lnSpc>
-                <a:spcPct val="118000"/>
-              </a:lnSpc>
-              <a:buNone/>
-            </a:pPr>
-            <a:r>
-              <a:rPr lang="en-US" sz="1700" dirty="0">
-                <a:solidFill>
-                  <a:srgbClr val="3F3F46"/>
-                </a:solidFill>
-                <a:latin typeface="IBM Plex Mono" pitchFamily="34" charset="0"/>
-                <a:ea typeface="IBM Plex Mono" pitchFamily="34" charset="-122"/>
-                <a:cs typeface="IBM Plex Mono" pitchFamily="34" charset="-120"/>
-              </a:rPr>
-              <a:t>(</a:t>
-            </a:r>
-            <a:pPr indent="0" marL="0">
-              <a:lnSpc>
-                <a:spcPct val="118000"/>
-              </a:lnSpc>
-              <a:buNone/>
-            </a:pPr>
-            <a:r>
-              <a:rPr lang="en-US" sz="1700" dirty="0">
-                <a:solidFill>
-                  <a:srgbClr val="3F3F46"/>
-                </a:solidFill>
-                <a:latin typeface="IBM Plex Mono" pitchFamily="34" charset="0"/>
-                <a:ea typeface="IBM Plex Mono" pitchFamily="34" charset="-122"/>
-                <a:cs typeface="IBM Plex Mono" pitchFamily="34" charset="-120"/>
-              </a:rPr>
-              <a:t>)</a:t>
-            </a:r>
-            <a:pPr indent="0" marL="0">
-              <a:lnSpc>
-                <a:spcPct val="118000"/>
-              </a:lnSpc>
-              <a:buNone/>
-            </a:pPr>
-            <a:r>
-              <a:rPr lang="en-US" sz="1700" dirty="0">
-                <a:solidFill>
-                  <a:srgbClr val="101828"/>
+              <a:rPr lang="en-US" sz="1300" dirty="0">
+                <a:solidFill>
+                  <a:srgbClr val="667085"/>
                 </a:solidFill>
                 <a:latin typeface="IBM Plex Sans" pitchFamily="34" charset="0"/>
                 <a:ea typeface="IBM Plex Sans" pitchFamily="34" charset="-122"/>
                 <a:cs typeface="IBM Plex Sans" pitchFamily="34" charset="-120"/>
               </a:rPr>
-              <a:t>.</a:t>
-            </a:r>
-            <a:endParaRPr lang="en-US" sz="1700" dirty="0"/>
+              <a:t>An index error is nearly always an off-by-one: the last index of a list of 7 is 6, not 7.</a:t>
+            </a:r>
+            <a:endParaRPr lang="en-US" sz="1300" dirty="0"/>
           </a:p>
         </p:txBody>
       </p:sp>
@@ -4510,73 +4528,12 @@
         </p:nvSpPr>
         <p:spPr>
           <a:xfrm>
-            <a:off x="10515600" y="3429000"/>
-            <a:ext cx="868680" cy="493776"/>
+            <a:off x="502920" y="3794760"/>
+            <a:ext cx="5394960" cy="1737360"/>
           </a:xfrm>
           <a:prstGeom prst="roundRect">
             <a:avLst>
-              <a:gd name="adj" fmla="val 18519"/>
-            </a:avLst>
-          </a:prstGeom>
-          <a:solidFill>
-            <a:srgbClr val="EEF2FB"/>
-          </a:solidFill>
-          <a:ln/>
-        </p:spPr>
-      </p:sp>
-      <p:sp>
-        <p:nvSpPr>
-          <p:cNvPr id="14" name="Text 12"/>
-          <p:cNvSpPr txBox="1"/>
-          <p:nvPr/>
-        </p:nvSpPr>
-        <p:spPr>
-          <a:xfrm>
-            <a:off x="10515600" y="3429000"/>
-            <a:ext cx="868680" cy="493776"/>
-          </a:xfrm>
-          <a:prstGeom prst="rect">
-            <a:avLst/>
-          </a:prstGeom>
-          <a:noFill/>
-          <a:ln/>
-        </p:spPr>
-        <p:txBody>
-          <a:bodyPr wrap="square" lIns="0" tIns="0" rIns="0" bIns="0" rtlCol="0" anchor="ctr"/>
-          <a:lstStyle/>
-          <a:p>
-            <a:pPr algn="ctr" indent="0" marL="0">
-              <a:buNone/>
-            </a:pPr>
-            <a:r>
-              <a:rPr lang="en-US" sz="1500" b="1" dirty="0">
-                <a:solidFill>
-                  <a:srgbClr val="2D63FF"/>
-                </a:solidFill>
-                <a:latin typeface="IBM Plex Mono" pitchFamily="34" charset="0"/>
-                <a:ea typeface="IBM Plex Mono" pitchFamily="34" charset="-122"/>
-                <a:cs typeface="IBM Plex Mono" pitchFamily="34" charset="-120"/>
-              </a:rPr>
-              <a:t>[5]</a:t>
-            </a:r>
-            <a:endParaRPr lang="en-US" sz="1500" dirty="0"/>
-          </a:p>
-        </p:txBody>
-      </p:sp>
-      <p:sp>
-        <p:nvSpPr>
-          <p:cNvPr id="15" name="Shape 13"/>
-          <p:cNvSpPr/>
-          <p:nvPr/>
-        </p:nvSpPr>
-        <p:spPr>
-          <a:xfrm>
-            <a:off x="502920" y="4425696"/>
-            <a:ext cx="11155680" cy="1097280"/>
-          </a:xfrm>
-          <a:prstGeom prst="roundRect">
-            <a:avLst>
-              <a:gd name="adj" fmla="val 10000"/>
+              <a:gd name="adj" fmla="val 6316"/>
             </a:avLst>
           </a:prstGeom>
           <a:solidFill>
@@ -4584,7 +4541,7 @@
           </a:solidFill>
           <a:ln w="15875">
             <a:solidFill>
-              <a:srgbClr val="D9DEE7"/>
+              <a:srgbClr val="2D63FF"/>
             </a:solidFill>
             <a:prstDash val="solid"/>
           </a:ln>
@@ -4592,67 +4549,150 @@
       </p:sp>
       <p:sp>
         <p:nvSpPr>
-          <p:cNvPr id="16" name="Text 14"/>
-          <p:cNvSpPr txBox="1"/>
-          <p:nvPr/>
-        </p:nvSpPr>
-        <p:spPr>
-          <a:xfrm>
-            <a:off x="914400" y="4535424"/>
-            <a:ext cx="9418320" cy="877824"/>
-          </a:xfrm>
-          <a:prstGeom prst="rect">
-            <a:avLst/>
-          </a:prstGeom>
-          <a:noFill/>
-          <a:ln/>
-        </p:spPr>
-        <p:txBody>
-          <a:bodyPr wrap="square" lIns="0" tIns="0" rIns="0" bIns="0" rtlCol="0" anchor="ctr"/>
-          <a:lstStyle/>
-          <a:p>
-            <a:pPr indent="0" marL="0">
-              <a:lnSpc>
-                <a:spcPct val="118000"/>
-              </a:lnSpc>
-              <a:buNone/>
-            </a:pPr>
-            <a:r>
-              <a:rPr lang="en-US" sz="1700" dirty="0">
-                <a:solidFill>
-                  <a:srgbClr val="101828"/>
+          <p:cNvPr id="14" name="Text 12"/>
+          <p:cNvSpPr txBox="1"/>
+          <p:nvPr/>
+        </p:nvSpPr>
+        <p:spPr>
+          <a:xfrm>
+            <a:off x="822960" y="3977640"/>
+            <a:ext cx="4754880" cy="365760"/>
+          </a:xfrm>
+          <a:prstGeom prst="rect">
+            <a:avLst/>
+          </a:prstGeom>
+          <a:noFill/>
+          <a:ln/>
+        </p:spPr>
+        <p:txBody>
+          <a:bodyPr wrap="square" lIns="0" tIns="0" rIns="0" bIns="0" rtlCol="0" anchor="ctr"/>
+          <a:lstStyle/>
+          <a:p>
+            <a:pPr indent="0" marL="0">
+              <a:buNone/>
+            </a:pPr>
+            <a:r>
+              <a:rPr lang="en-US" sz="1600" b="1" dirty="0">
+                <a:solidFill>
+                  <a:srgbClr val="2D63FF"/>
                 </a:solidFill>
                 <a:latin typeface="IBM Plex Sans" pitchFamily="34" charset="0"/>
                 <a:ea typeface="IBM Plex Sans" pitchFamily="34" charset="-122"/>
                 <a:cs typeface="IBM Plex Sans" pitchFamily="34" charset="-120"/>
               </a:rPr>
-              <a:t>Write a program that reads five words into a list, removes a word the user types in, then prints the words that are left and how many there are.</a:t>
-            </a:r>
-            <a:endParaRPr lang="en-US" sz="1700" dirty="0"/>
-          </a:p>
-        </p:txBody>
-      </p:sp>
-      <p:sp>
-        <p:nvSpPr>
-          <p:cNvPr id="17" name="Shape 15"/>
+              <a:t>Which loop</a:t>
+            </a:r>
+            <a:endParaRPr lang="en-US" sz="1600" dirty="0"/>
+          </a:p>
+        </p:txBody>
+      </p:sp>
+      <p:sp>
+        <p:nvSpPr>
+          <p:cNvPr id="15" name="Text 13"/>
+          <p:cNvSpPr txBox="1"/>
+          <p:nvPr/>
+        </p:nvSpPr>
+        <p:spPr>
+          <a:xfrm>
+            <a:off x="822960" y="4361688"/>
+            <a:ext cx="4754880" cy="1005840"/>
+          </a:xfrm>
+          <a:prstGeom prst="rect">
+            <a:avLst/>
+          </a:prstGeom>
+          <a:noFill/>
+          <a:ln/>
+        </p:spPr>
+        <p:txBody>
+          <a:bodyPr wrap="square" lIns="0" tIns="0" rIns="0" bIns="0" rtlCol="0" anchor="t"/>
+          <a:lstStyle/>
+          <a:p>
+            <a:pPr indent="0" marL="0">
+              <a:lnSpc>
+                <a:spcPct val="120000"/>
+              </a:lnSpc>
+              <a:buNone/>
+            </a:pPr>
+            <a:r>
+              <a:rPr lang="en-US" sz="1300" dirty="0">
+                <a:solidFill>
+                  <a:srgbClr val="667085"/>
+                </a:solidFill>
+                <a:latin typeface="IBM Plex Sans" pitchFamily="34" charset="0"/>
+                <a:ea typeface="IBM Plex Sans" pitchFamily="34" charset="-122"/>
+                <a:cs typeface="IBM Plex Sans" pitchFamily="34" charset="-120"/>
+              </a:rPr>
+              <a:t>for item in list is tidier when you only need the values. Use range(len(list)) when you need the position too.</a:t>
+            </a:r>
+            <a:endParaRPr lang="en-US" sz="1300" dirty="0"/>
+          </a:p>
+        </p:txBody>
+      </p:sp>
+      <p:sp>
+        <p:nvSpPr>
+          <p:cNvPr id="16" name="Shape 14"/>
           <p:cNvSpPr/>
           <p:nvPr/>
         </p:nvSpPr>
         <p:spPr>
           <a:xfrm>
-            <a:off x="10515600" y="4727448"/>
-            <a:ext cx="868680" cy="493776"/>
+            <a:off x="6217920" y="3794760"/>
+            <a:ext cx="5394960" cy="1737360"/>
           </a:xfrm>
           <a:prstGeom prst="roundRect">
             <a:avLst>
-              <a:gd name="adj" fmla="val 18519"/>
+              <a:gd name="adj" fmla="val 6316"/>
             </a:avLst>
           </a:prstGeom>
           <a:solidFill>
-            <a:srgbClr val="EEF2FB"/>
+            <a:srgbClr val="FFFFFF"/>
           </a:solidFill>
-          <a:ln/>
-        </p:spPr>
+          <a:ln w="15875">
+            <a:solidFill>
+              <a:srgbClr val="08A6A6"/>
+            </a:solidFill>
+            <a:prstDash val="solid"/>
+          </a:ln>
+        </p:spPr>
+      </p:sp>
+      <p:sp>
+        <p:nvSpPr>
+          <p:cNvPr id="17" name="Text 15"/>
+          <p:cNvSpPr txBox="1"/>
+          <p:nvPr/>
+        </p:nvSpPr>
+        <p:spPr>
+          <a:xfrm>
+            <a:off x="6537960" y="3977640"/>
+            <a:ext cx="4754880" cy="365760"/>
+          </a:xfrm>
+          <a:prstGeom prst="rect">
+            <a:avLst/>
+          </a:prstGeom>
+          <a:noFill/>
+          <a:ln/>
+        </p:spPr>
+        <p:txBody>
+          <a:bodyPr wrap="square" lIns="0" tIns="0" rIns="0" bIns="0" rtlCol="0" anchor="ctr"/>
+          <a:lstStyle/>
+          <a:p>
+            <a:pPr indent="0" marL="0">
+              <a:buNone/>
+            </a:pPr>
+            <a:r>
+              <a:rPr lang="en-US" sz="1600" b="1" dirty="0">
+                <a:solidFill>
+                  <a:srgbClr val="08A6A6"/>
+                </a:solidFill>
+                <a:latin typeface="IBM Plex Sans" pitchFamily="34" charset="0"/>
+                <a:ea typeface="IBM Plex Sans" pitchFamily="34" charset="-122"/>
+                <a:cs typeface="IBM Plex Sans" pitchFamily="34" charset="-120"/>
+              </a:rPr>
+              <a:t>Removing safely</a:t>
+            </a:r>
+            <a:endParaRPr lang="en-US" sz="1600" dirty="0"/>
+          </a:p>
+        </p:txBody>
       </p:sp>
       <p:sp>
         <p:nvSpPr>
@@ -4662,34 +4702,37 @@
         </p:nvSpPr>
         <p:spPr>
           <a:xfrm>
-            <a:off x="10515600" y="4727448"/>
-            <a:ext cx="868680" cy="493776"/>
-          </a:xfrm>
-          <a:prstGeom prst="rect">
-            <a:avLst/>
-          </a:prstGeom>
-          <a:noFill/>
-          <a:ln/>
-        </p:spPr>
-        <p:txBody>
-          <a:bodyPr wrap="square" lIns="0" tIns="0" rIns="0" bIns="0" rtlCol="0" anchor="ctr"/>
-          <a:lstStyle/>
-          <a:p>
-            <a:pPr algn="ctr" indent="0" marL="0">
-              <a:buNone/>
-            </a:pPr>
-            <a:r>
-              <a:rPr lang="en-US" sz="1500" b="1" dirty="0">
-                <a:solidFill>
-                  <a:srgbClr val="2D63FF"/>
-                </a:solidFill>
-                <a:latin typeface="IBM Plex Mono" pitchFamily="34" charset="0"/>
-                <a:ea typeface="IBM Plex Mono" pitchFamily="34" charset="-122"/>
-                <a:cs typeface="IBM Plex Mono" pitchFamily="34" charset="-120"/>
-              </a:rPr>
-              <a:t>[4]</a:t>
-            </a:r>
-            <a:endParaRPr lang="en-US" sz="1500" dirty="0"/>
+            <a:off x="6537960" y="4361688"/>
+            <a:ext cx="4754880" cy="1005840"/>
+          </a:xfrm>
+          <a:prstGeom prst="rect">
+            <a:avLst/>
+          </a:prstGeom>
+          <a:noFill/>
+          <a:ln/>
+        </p:spPr>
+        <p:txBody>
+          <a:bodyPr wrap="square" lIns="0" tIns="0" rIns="0" bIns="0" rtlCol="0" anchor="t"/>
+          <a:lstStyle/>
+          <a:p>
+            <a:pPr indent="0" marL="0">
+              <a:lnSpc>
+                <a:spcPct val="120000"/>
+              </a:lnSpc>
+              <a:buNone/>
+            </a:pPr>
+            <a:r>
+              <a:rPr lang="en-US" sz="1300" dirty="0">
+                <a:solidFill>
+                  <a:srgbClr val="667085"/>
+                </a:solidFill>
+                <a:latin typeface="IBM Plex Sans" pitchFamily="34" charset="0"/>
+                <a:ea typeface="IBM Plex Sans" pitchFamily="34" charset="-122"/>
+                <a:cs typeface="IBM Plex Sans" pitchFamily="34" charset="-120"/>
+              </a:rPr>
+              <a:t>Deleting from a list while looping over it makes the loop skip items. Build a new list instead.</a:t>
+            </a:r>
+            <a:endParaRPr lang="en-US" sz="1300" dirty="0"/>
           </a:p>
         </p:txBody>
       </p:sp>
@@ -4704,6 +4747,910 @@
 <file path=ppt/slides/slide14.xml><?xml version="1.0" encoding="utf-8"?>
 <p:sld xmlns:a="http://schemas.openxmlformats.org/drawingml/2006/main" xmlns:r="http://schemas.openxmlformats.org/officeDocument/2006/relationships" xmlns:p="http://schemas.openxmlformats.org/presentationml/2006/main">
   <p:cSld name="Slide 14">
+    <p:bg>
+      <p:bgPr>
+        <a:solidFill>
+          <a:srgbClr val="F7F7F4"/>
+        </a:solidFill>
+      </p:bgPr>
+    </p:bg>
+    <p:spTree>
+      <p:nvGrpSpPr>
+        <p:cNvPr id="1" name=""/>
+        <p:cNvGrpSpPr/>
+        <p:nvPr/>
+      </p:nvGrpSpPr>
+      <p:grpSpPr>
+        <a:xfrm>
+          <a:off x="0" y="0"/>
+          <a:ext cx="0" cy="0"/>
+          <a:chOff x="0" y="0"/>
+          <a:chExt cx="0" cy="0"/>
+        </a:xfrm>
+      </p:grpSpPr>
+      <p:sp>
+        <p:nvSpPr>
+          <p:cNvPr id="2" name="Shape 0"/>
+          <p:cNvSpPr/>
+          <p:nvPr/>
+        </p:nvSpPr>
+        <p:spPr>
+          <a:xfrm>
+            <a:off x="0" y="0"/>
+            <a:ext cx="12188952" cy="82296"/>
+          </a:xfrm>
+          <a:prstGeom prst="rect">
+            <a:avLst/>
+          </a:prstGeom>
+          <a:solidFill>
+            <a:srgbClr val="2D63FF"/>
+          </a:solidFill>
+          <a:ln/>
+        </p:spPr>
+      </p:sp>
+      <p:sp>
+        <p:nvSpPr>
+          <p:cNvPr id="3" name="Text 1"/>
+          <p:cNvSpPr txBox="1"/>
+          <p:nvPr/>
+        </p:nvSpPr>
+        <p:spPr>
+          <a:xfrm>
+            <a:off x="502920" y="6236208"/>
+            <a:ext cx="7772400" cy="365760"/>
+          </a:xfrm>
+          <a:prstGeom prst="rect">
+            <a:avLst/>
+          </a:prstGeom>
+          <a:noFill/>
+          <a:ln/>
+        </p:spPr>
+        <p:txBody>
+          <a:bodyPr wrap="square" lIns="0" tIns="0" rIns="0" bIns="0" rtlCol="0" anchor="ctr"/>
+          <a:lstStyle/>
+          <a:p>
+            <a:pPr indent="0" marL="0">
+              <a:buNone/>
+            </a:pPr>
+            <a:r>
+              <a:rPr lang="en-US" sz="1100" dirty="0">
+                <a:solidFill>
+                  <a:srgbClr val="667085"/>
+                </a:solidFill>
+                <a:latin typeface="IBM Plex Mono" pitchFamily="34" charset="0"/>
+                <a:ea typeface="IBM Plex Mono" pitchFamily="34" charset="-122"/>
+                <a:cs typeface="IBM Plex Mono" pitchFamily="34" charset="-120"/>
+              </a:rPr>
+              <a:t>Python programming  |  Lesson 7</a:t>
+            </a:r>
+            <a:endParaRPr lang="en-US" sz="1100" dirty="0"/>
+          </a:p>
+        </p:txBody>
+      </p:sp>
+      <p:sp>
+        <p:nvSpPr>
+          <p:cNvPr id="4" name="Text 2"/>
+          <p:cNvSpPr txBox="1"/>
+          <p:nvPr/>
+        </p:nvSpPr>
+        <p:spPr>
+          <a:xfrm>
+            <a:off x="9326880" y="6236208"/>
+            <a:ext cx="2377440" cy="365760"/>
+          </a:xfrm>
+          <a:prstGeom prst="rect">
+            <a:avLst/>
+          </a:prstGeom>
+          <a:noFill/>
+          <a:ln/>
+        </p:spPr>
+        <p:txBody>
+          <a:bodyPr wrap="square" lIns="0" tIns="0" rIns="0" bIns="0" rtlCol="0" anchor="ctr"/>
+          <a:lstStyle/>
+          <a:p>
+            <a:pPr algn="r" indent="0" marL="0">
+              <a:buNone/>
+            </a:pPr>
+            <a:r>
+              <a:rPr lang="en-US" sz="1100" dirty="0">
+                <a:solidFill>
+                  <a:srgbClr val="667085"/>
+                </a:solidFill>
+                <a:latin typeface="IBM Plex Mono" pitchFamily="34" charset="0"/>
+                <a:ea typeface="IBM Plex Mono" pitchFamily="34" charset="-122"/>
+                <a:cs typeface="IBM Plex Mono" pitchFamily="34" charset="-120"/>
+              </a:rPr>
+              <a:t>Revise 360</a:t>
+            </a:r>
+            <a:endParaRPr lang="en-US" sz="1100" dirty="0"/>
+          </a:p>
+        </p:txBody>
+      </p:sp>
+      <p:sp>
+        <p:nvSpPr>
+          <p:cNvPr id="5" name="Text 3"/>
+          <p:cNvSpPr txBox="1"/>
+          <p:nvPr/>
+        </p:nvSpPr>
+        <p:spPr>
+          <a:xfrm>
+            <a:off x="502920" y="411480"/>
+            <a:ext cx="11155680" cy="777240"/>
+          </a:xfrm>
+          <a:prstGeom prst="rect">
+            <a:avLst/>
+          </a:prstGeom>
+          <a:noFill/>
+          <a:ln/>
+        </p:spPr>
+        <p:txBody>
+          <a:bodyPr wrap="square" lIns="0" tIns="0" rIns="0" bIns="0" rtlCol="0" anchor="ctr"/>
+          <a:lstStyle/>
+          <a:p>
+            <a:pPr indent="0" marL="0">
+              <a:buNone/>
+            </a:pPr>
+            <a:r>
+              <a:rPr lang="en-US" sz="3200" b="1" dirty="0">
+                <a:solidFill>
+                  <a:srgbClr val="101828"/>
+                </a:solidFill>
+                <a:latin typeface="IBM Plex Sans" pitchFamily="34" charset="0"/>
+                <a:ea typeface="IBM Plex Sans" pitchFamily="34" charset="-122"/>
+                <a:cs typeface="IBM Plex Sans" pitchFamily="34" charset="-120"/>
+              </a:rPr>
+              <a:t>Exam practice</a:t>
+            </a:r>
+            <a:endParaRPr lang="en-US" sz="3200" dirty="0"/>
+          </a:p>
+        </p:txBody>
+      </p:sp>
+      <p:sp>
+        <p:nvSpPr>
+          <p:cNvPr id="6" name="Text 4"/>
+          <p:cNvSpPr txBox="1"/>
+          <p:nvPr/>
+        </p:nvSpPr>
+        <p:spPr>
+          <a:xfrm>
+            <a:off x="502920" y="1170432"/>
+            <a:ext cx="11155680" cy="411480"/>
+          </a:xfrm>
+          <a:prstGeom prst="rect">
+            <a:avLst/>
+          </a:prstGeom>
+          <a:noFill/>
+          <a:ln/>
+        </p:spPr>
+        <p:txBody>
+          <a:bodyPr wrap="square" lIns="0" tIns="0" rIns="0" bIns="0" rtlCol="0" anchor="ctr"/>
+          <a:lstStyle/>
+          <a:p>
+            <a:pPr indent="0" marL="0">
+              <a:buNone/>
+            </a:pPr>
+            <a:r>
+              <a:rPr lang="en-US" sz="1500" dirty="0">
+                <a:solidFill>
+                  <a:srgbClr val="667085"/>
+                </a:solidFill>
+                <a:latin typeface="IBM Plex Sans" pitchFamily="34" charset="0"/>
+                <a:ea typeface="IBM Plex Sans" pitchFamily="34" charset="-122"/>
+                <a:cs typeface="IBM Plex Sans" pitchFamily="34" charset="-120"/>
+              </a:rPr>
+              <a:t>Devices away. Answer from memory on the worksheet.</a:t>
+            </a:r>
+            <a:endParaRPr lang="en-US" sz="1500" dirty="0"/>
+          </a:p>
+        </p:txBody>
+      </p:sp>
+      <p:sp>
+        <p:nvSpPr>
+          <p:cNvPr id="7" name="Shape 5"/>
+          <p:cNvSpPr/>
+          <p:nvPr/>
+        </p:nvSpPr>
+        <p:spPr>
+          <a:xfrm>
+            <a:off x="502920" y="1828800"/>
+            <a:ext cx="11155680" cy="1097280"/>
+          </a:xfrm>
+          <a:prstGeom prst="roundRect">
+            <a:avLst>
+              <a:gd name="adj" fmla="val 10000"/>
+            </a:avLst>
+          </a:prstGeom>
+          <a:solidFill>
+            <a:srgbClr val="FFFFFF"/>
+          </a:solidFill>
+          <a:ln w="15875">
+            <a:solidFill>
+              <a:srgbClr val="D9DEE7"/>
+            </a:solidFill>
+            <a:prstDash val="solid"/>
+          </a:ln>
+        </p:spPr>
+      </p:sp>
+      <p:sp>
+        <p:nvSpPr>
+          <p:cNvPr id="8" name="Text 6"/>
+          <p:cNvSpPr txBox="1"/>
+          <p:nvPr/>
+        </p:nvSpPr>
+        <p:spPr>
+          <a:xfrm>
+            <a:off x="914400" y="1938528"/>
+            <a:ext cx="9418320" cy="877824"/>
+          </a:xfrm>
+          <a:prstGeom prst="rect">
+            <a:avLst/>
+          </a:prstGeom>
+          <a:noFill/>
+          <a:ln/>
+        </p:spPr>
+        <p:txBody>
+          <a:bodyPr wrap="square" lIns="0" tIns="0" rIns="0" bIns="0" rtlCol="0" anchor="ctr"/>
+          <a:lstStyle/>
+          <a:p>
+            <a:pPr indent="0" marL="0">
+              <a:lnSpc>
+                <a:spcPct val="118000"/>
+              </a:lnSpc>
+              <a:buNone/>
+            </a:pPr>
+            <a:r>
+              <a:rPr lang="en-US" sz="1700" dirty="0">
+                <a:solidFill>
+                  <a:srgbClr val="101828"/>
+                </a:solidFill>
+                <a:latin typeface="IBM Plex Sans" pitchFamily="34" charset="0"/>
+                <a:ea typeface="IBM Plex Sans" pitchFamily="34" charset="-122"/>
+                <a:cs typeface="IBM Plex Sans" pitchFamily="34" charset="-120"/>
+              </a:rPr>
+              <a:t>A loop over a list of six numbers begins </a:t>
+            </a:r>
+            <a:pPr indent="0" marL="0">
+              <a:lnSpc>
+                <a:spcPct val="118000"/>
+              </a:lnSpc>
+              <a:buNone/>
+            </a:pPr>
+            <a:r>
+              <a:rPr lang="en-US" sz="1700" dirty="0">
+                <a:solidFill>
+                  <a:srgbClr val="6B21A8"/>
+                </a:solidFill>
+                <a:latin typeface="IBM Plex Mono" pitchFamily="34" charset="0"/>
+                <a:ea typeface="IBM Plex Mono" pitchFamily="34" charset="-122"/>
+                <a:cs typeface="IBM Plex Mono" pitchFamily="34" charset="-120"/>
+              </a:rPr>
+              <a:t>for</a:t>
+            </a:r>
+            <a:pPr indent="0" marL="0">
+              <a:lnSpc>
+                <a:spcPct val="118000"/>
+              </a:lnSpc>
+              <a:buNone/>
+            </a:pPr>
+            <a:r>
+              <a:rPr lang="en-US" sz="1700" dirty="0">
+                <a:solidFill>
+                  <a:srgbClr val="18181B"/>
+                </a:solidFill>
+                <a:latin typeface="IBM Plex Mono" pitchFamily="34" charset="0"/>
+                <a:ea typeface="IBM Plex Mono" pitchFamily="34" charset="-122"/>
+                <a:cs typeface="IBM Plex Mono" pitchFamily="34" charset="-120"/>
+              </a:rPr>
+              <a:t> </a:t>
+            </a:r>
+            <a:pPr indent="0" marL="0">
+              <a:lnSpc>
+                <a:spcPct val="118000"/>
+              </a:lnSpc>
+              <a:buNone/>
+            </a:pPr>
+            <a:r>
+              <a:rPr lang="en-US" sz="1700" dirty="0">
+                <a:solidFill>
+                  <a:srgbClr val="18181B"/>
+                </a:solidFill>
+                <a:latin typeface="IBM Plex Mono" pitchFamily="34" charset="0"/>
+                <a:ea typeface="IBM Plex Mono" pitchFamily="34" charset="-122"/>
+                <a:cs typeface="IBM Plex Mono" pitchFamily="34" charset="-120"/>
+              </a:rPr>
+              <a:t>i</a:t>
+            </a:r>
+            <a:pPr indent="0" marL="0">
+              <a:lnSpc>
+                <a:spcPct val="118000"/>
+              </a:lnSpc>
+              <a:buNone/>
+            </a:pPr>
+            <a:r>
+              <a:rPr lang="en-US" sz="1700" dirty="0">
+                <a:solidFill>
+                  <a:srgbClr val="18181B"/>
+                </a:solidFill>
+                <a:latin typeface="IBM Plex Mono" pitchFamily="34" charset="0"/>
+                <a:ea typeface="IBM Plex Mono" pitchFamily="34" charset="-122"/>
+                <a:cs typeface="IBM Plex Mono" pitchFamily="34" charset="-120"/>
+              </a:rPr>
+              <a:t> </a:t>
+            </a:r>
+            <a:pPr indent="0" marL="0">
+              <a:lnSpc>
+                <a:spcPct val="118000"/>
+              </a:lnSpc>
+              <a:buNone/>
+            </a:pPr>
+            <a:r>
+              <a:rPr lang="en-US" sz="1700" dirty="0">
+                <a:solidFill>
+                  <a:srgbClr val="6B21A8"/>
+                </a:solidFill>
+                <a:latin typeface="IBM Plex Mono" pitchFamily="34" charset="0"/>
+                <a:ea typeface="IBM Plex Mono" pitchFamily="34" charset="-122"/>
+                <a:cs typeface="IBM Plex Mono" pitchFamily="34" charset="-120"/>
+              </a:rPr>
+              <a:t>in</a:t>
+            </a:r>
+            <a:pPr indent="0" marL="0">
+              <a:lnSpc>
+                <a:spcPct val="118000"/>
+              </a:lnSpc>
+              <a:buNone/>
+            </a:pPr>
+            <a:r>
+              <a:rPr lang="en-US" sz="1700" dirty="0">
+                <a:solidFill>
+                  <a:srgbClr val="18181B"/>
+                </a:solidFill>
+                <a:latin typeface="IBM Plex Mono" pitchFamily="34" charset="0"/>
+                <a:ea typeface="IBM Plex Mono" pitchFamily="34" charset="-122"/>
+                <a:cs typeface="IBM Plex Mono" pitchFamily="34" charset="-120"/>
+              </a:rPr>
+              <a:t> </a:t>
+            </a:r>
+            <a:pPr indent="0" marL="0">
+              <a:lnSpc>
+                <a:spcPct val="118000"/>
+              </a:lnSpc>
+              <a:buNone/>
+            </a:pPr>
+            <a:r>
+              <a:rPr lang="en-US" sz="1700" dirty="0">
+                <a:solidFill>
+                  <a:srgbClr val="1D4ED8"/>
+                </a:solidFill>
+                <a:latin typeface="IBM Plex Mono" pitchFamily="34" charset="0"/>
+                <a:ea typeface="IBM Plex Mono" pitchFamily="34" charset="-122"/>
+                <a:cs typeface="IBM Plex Mono" pitchFamily="34" charset="-120"/>
+              </a:rPr>
+              <a:t>range</a:t>
+            </a:r>
+            <a:pPr indent="0" marL="0">
+              <a:lnSpc>
+                <a:spcPct val="118000"/>
+              </a:lnSpc>
+              <a:buNone/>
+            </a:pPr>
+            <a:r>
+              <a:rPr lang="en-US" sz="1700" dirty="0">
+                <a:solidFill>
+                  <a:srgbClr val="3F3F46"/>
+                </a:solidFill>
+                <a:latin typeface="IBM Plex Mono" pitchFamily="34" charset="0"/>
+                <a:ea typeface="IBM Plex Mono" pitchFamily="34" charset="-122"/>
+                <a:cs typeface="IBM Plex Mono" pitchFamily="34" charset="-120"/>
+              </a:rPr>
+              <a:t>(</a:t>
+            </a:r>
+            <a:pPr indent="0" marL="0">
+              <a:lnSpc>
+                <a:spcPct val="118000"/>
+              </a:lnSpc>
+              <a:buNone/>
+            </a:pPr>
+            <a:r>
+              <a:rPr lang="en-US" sz="1700" dirty="0">
+                <a:solidFill>
+                  <a:srgbClr val="9A3412"/>
+                </a:solidFill>
+                <a:latin typeface="IBM Plex Mono" pitchFamily="34" charset="0"/>
+                <a:ea typeface="IBM Plex Mono" pitchFamily="34" charset="-122"/>
+                <a:cs typeface="IBM Plex Mono" pitchFamily="34" charset="-120"/>
+              </a:rPr>
+              <a:t>1</a:t>
+            </a:r>
+            <a:pPr indent="0" marL="0">
+              <a:lnSpc>
+                <a:spcPct val="118000"/>
+              </a:lnSpc>
+              <a:buNone/>
+            </a:pPr>
+            <a:r>
+              <a:rPr lang="en-US" sz="1700" dirty="0">
+                <a:solidFill>
+                  <a:srgbClr val="3F3F46"/>
+                </a:solidFill>
+                <a:latin typeface="IBM Plex Mono" pitchFamily="34" charset="0"/>
+                <a:ea typeface="IBM Plex Mono" pitchFamily="34" charset="-122"/>
+                <a:cs typeface="IBM Plex Mono" pitchFamily="34" charset="-120"/>
+              </a:rPr>
+              <a:t>,</a:t>
+            </a:r>
+            <a:pPr indent="0" marL="0">
+              <a:lnSpc>
+                <a:spcPct val="118000"/>
+              </a:lnSpc>
+              <a:buNone/>
+            </a:pPr>
+            <a:r>
+              <a:rPr lang="en-US" sz="1700" dirty="0">
+                <a:solidFill>
+                  <a:srgbClr val="18181B"/>
+                </a:solidFill>
+                <a:latin typeface="IBM Plex Mono" pitchFamily="34" charset="0"/>
+                <a:ea typeface="IBM Plex Mono" pitchFamily="34" charset="-122"/>
+                <a:cs typeface="IBM Plex Mono" pitchFamily="34" charset="-120"/>
+              </a:rPr>
+              <a:t> </a:t>
+            </a:r>
+            <a:pPr indent="0" marL="0">
+              <a:lnSpc>
+                <a:spcPct val="118000"/>
+              </a:lnSpc>
+              <a:buNone/>
+            </a:pPr>
+            <a:r>
+              <a:rPr lang="en-US" sz="1700" dirty="0">
+                <a:solidFill>
+                  <a:srgbClr val="9A3412"/>
+                </a:solidFill>
+                <a:latin typeface="IBM Plex Mono" pitchFamily="34" charset="0"/>
+                <a:ea typeface="IBM Plex Mono" pitchFamily="34" charset="-122"/>
+                <a:cs typeface="IBM Plex Mono" pitchFamily="34" charset="-120"/>
+              </a:rPr>
+              <a:t>6</a:t>
+            </a:r>
+            <a:pPr indent="0" marL="0">
+              <a:lnSpc>
+                <a:spcPct val="118000"/>
+              </a:lnSpc>
+              <a:buNone/>
+            </a:pPr>
+            <a:r>
+              <a:rPr lang="en-US" sz="1700" dirty="0">
+                <a:solidFill>
+                  <a:srgbClr val="3F3F46"/>
+                </a:solidFill>
+                <a:latin typeface="IBM Plex Mono" pitchFamily="34" charset="0"/>
+                <a:ea typeface="IBM Plex Mono" pitchFamily="34" charset="-122"/>
+                <a:cs typeface="IBM Plex Mono" pitchFamily="34" charset="-120"/>
+              </a:rPr>
+              <a:t>)</a:t>
+            </a:r>
+            <a:pPr indent="0" marL="0">
+              <a:lnSpc>
+                <a:spcPct val="118000"/>
+              </a:lnSpc>
+              <a:buNone/>
+            </a:pPr>
+            <a:r>
+              <a:rPr lang="en-US" sz="1700" dirty="0">
+                <a:solidFill>
+                  <a:srgbClr val="101828"/>
+                </a:solidFill>
+                <a:latin typeface="IBM Plex Sans" pitchFamily="34" charset="0"/>
+                <a:ea typeface="IBM Plex Sans" pitchFamily="34" charset="-122"/>
+                <a:cs typeface="IBM Plex Sans" pitchFamily="34" charset="-120"/>
+              </a:rPr>
+              <a:t>. State which item is never looked at, and rewrite the line so that every item is included.</a:t>
+            </a:r>
+            <a:endParaRPr lang="en-US" sz="1700" dirty="0"/>
+          </a:p>
+        </p:txBody>
+      </p:sp>
+      <p:sp>
+        <p:nvSpPr>
+          <p:cNvPr id="9" name="Shape 7"/>
+          <p:cNvSpPr/>
+          <p:nvPr/>
+        </p:nvSpPr>
+        <p:spPr>
+          <a:xfrm>
+            <a:off x="10515600" y="2130552"/>
+            <a:ext cx="868680" cy="493776"/>
+          </a:xfrm>
+          <a:prstGeom prst="roundRect">
+            <a:avLst>
+              <a:gd name="adj" fmla="val 18519"/>
+            </a:avLst>
+          </a:prstGeom>
+          <a:solidFill>
+            <a:srgbClr val="EEF2FB"/>
+          </a:solidFill>
+          <a:ln/>
+        </p:spPr>
+      </p:sp>
+      <p:sp>
+        <p:nvSpPr>
+          <p:cNvPr id="10" name="Text 8"/>
+          <p:cNvSpPr txBox="1"/>
+          <p:nvPr/>
+        </p:nvSpPr>
+        <p:spPr>
+          <a:xfrm>
+            <a:off x="10515600" y="2130552"/>
+            <a:ext cx="868680" cy="493776"/>
+          </a:xfrm>
+          <a:prstGeom prst="rect">
+            <a:avLst/>
+          </a:prstGeom>
+          <a:noFill/>
+          <a:ln/>
+        </p:spPr>
+        <p:txBody>
+          <a:bodyPr wrap="square" lIns="0" tIns="0" rIns="0" bIns="0" rtlCol="0" anchor="ctr"/>
+          <a:lstStyle/>
+          <a:p>
+            <a:pPr algn="ctr" indent="0" marL="0">
+              <a:buNone/>
+            </a:pPr>
+            <a:r>
+              <a:rPr lang="en-US" sz="1500" b="1" dirty="0">
+                <a:solidFill>
+                  <a:srgbClr val="2D63FF"/>
+                </a:solidFill>
+                <a:latin typeface="IBM Plex Mono" pitchFamily="34" charset="0"/>
+                <a:ea typeface="IBM Plex Mono" pitchFamily="34" charset="-122"/>
+                <a:cs typeface="IBM Plex Mono" pitchFamily="34" charset="-120"/>
+              </a:rPr>
+              <a:t>[2]</a:t>
+            </a:r>
+            <a:endParaRPr lang="en-US" sz="1500" dirty="0"/>
+          </a:p>
+        </p:txBody>
+      </p:sp>
+      <p:sp>
+        <p:nvSpPr>
+          <p:cNvPr id="11" name="Shape 9"/>
+          <p:cNvSpPr/>
+          <p:nvPr/>
+        </p:nvSpPr>
+        <p:spPr>
+          <a:xfrm>
+            <a:off x="502920" y="3127248"/>
+            <a:ext cx="11155680" cy="1097280"/>
+          </a:xfrm>
+          <a:prstGeom prst="roundRect">
+            <a:avLst>
+              <a:gd name="adj" fmla="val 10000"/>
+            </a:avLst>
+          </a:prstGeom>
+          <a:solidFill>
+            <a:srgbClr val="FFFFFF"/>
+          </a:solidFill>
+          <a:ln w="15875">
+            <a:solidFill>
+              <a:srgbClr val="D9DEE7"/>
+            </a:solidFill>
+            <a:prstDash val="solid"/>
+          </a:ln>
+        </p:spPr>
+      </p:sp>
+      <p:sp>
+        <p:nvSpPr>
+          <p:cNvPr id="12" name="Text 10"/>
+          <p:cNvSpPr txBox="1"/>
+          <p:nvPr/>
+        </p:nvSpPr>
+        <p:spPr>
+          <a:xfrm>
+            <a:off x="914400" y="3236976"/>
+            <a:ext cx="9418320" cy="877824"/>
+          </a:xfrm>
+          <a:prstGeom prst="rect">
+            <a:avLst/>
+          </a:prstGeom>
+          <a:noFill/>
+          <a:ln/>
+        </p:spPr>
+        <p:txBody>
+          <a:bodyPr wrap="square" lIns="0" tIns="0" rIns="0" bIns="0" rtlCol="0" anchor="ctr"/>
+          <a:lstStyle/>
+          <a:p>
+            <a:pPr indent="0" marL="0">
+              <a:lnSpc>
+                <a:spcPct val="118000"/>
+              </a:lnSpc>
+              <a:buNone/>
+            </a:pPr>
+            <a:r>
+              <a:rPr lang="en-US" sz="1700" dirty="0">
+                <a:solidFill>
+                  <a:srgbClr val="101828"/>
+                </a:solidFill>
+                <a:latin typeface="IBM Plex Sans" pitchFamily="34" charset="0"/>
+                <a:ea typeface="IBM Plex Sans" pitchFamily="34" charset="-122"/>
+                <a:cs typeface="IBM Plex Sans" pitchFamily="34" charset="-120"/>
+              </a:rPr>
+              <a:t>Write a program that reads seven whole numbers into a list, then prints the largest and the position it is stored at, without using </a:t>
+            </a:r>
+            <a:pPr indent="0" marL="0">
+              <a:lnSpc>
+                <a:spcPct val="118000"/>
+              </a:lnSpc>
+              <a:buNone/>
+            </a:pPr>
+            <a:r>
+              <a:rPr lang="en-US" sz="1700" dirty="0">
+                <a:solidFill>
+                  <a:srgbClr val="1D4ED8"/>
+                </a:solidFill>
+                <a:latin typeface="IBM Plex Mono" pitchFamily="34" charset="0"/>
+                <a:ea typeface="IBM Plex Mono" pitchFamily="34" charset="-122"/>
+                <a:cs typeface="IBM Plex Mono" pitchFamily="34" charset="-120"/>
+              </a:rPr>
+              <a:t>max</a:t>
+            </a:r>
+            <a:pPr indent="0" marL="0">
+              <a:lnSpc>
+                <a:spcPct val="118000"/>
+              </a:lnSpc>
+              <a:buNone/>
+            </a:pPr>
+            <a:r>
+              <a:rPr lang="en-US" sz="1700" dirty="0">
+                <a:solidFill>
+                  <a:srgbClr val="3F3F46"/>
+                </a:solidFill>
+                <a:latin typeface="IBM Plex Mono" pitchFamily="34" charset="0"/>
+                <a:ea typeface="IBM Plex Mono" pitchFamily="34" charset="-122"/>
+                <a:cs typeface="IBM Plex Mono" pitchFamily="34" charset="-120"/>
+              </a:rPr>
+              <a:t>(</a:t>
+            </a:r>
+            <a:pPr indent="0" marL="0">
+              <a:lnSpc>
+                <a:spcPct val="118000"/>
+              </a:lnSpc>
+              <a:buNone/>
+            </a:pPr>
+            <a:r>
+              <a:rPr lang="en-US" sz="1700" dirty="0">
+                <a:solidFill>
+                  <a:srgbClr val="3F3F46"/>
+                </a:solidFill>
+                <a:latin typeface="IBM Plex Mono" pitchFamily="34" charset="0"/>
+                <a:ea typeface="IBM Plex Mono" pitchFamily="34" charset="-122"/>
+                <a:cs typeface="IBM Plex Mono" pitchFamily="34" charset="-120"/>
+              </a:rPr>
+              <a:t>)</a:t>
+            </a:r>
+            <a:pPr indent="0" marL="0">
+              <a:lnSpc>
+                <a:spcPct val="118000"/>
+              </a:lnSpc>
+              <a:buNone/>
+            </a:pPr>
+            <a:r>
+              <a:rPr lang="en-US" sz="1700" dirty="0">
+                <a:solidFill>
+                  <a:srgbClr val="101828"/>
+                </a:solidFill>
+                <a:latin typeface="IBM Plex Sans" pitchFamily="34" charset="0"/>
+                <a:ea typeface="IBM Plex Sans" pitchFamily="34" charset="-122"/>
+                <a:cs typeface="IBM Plex Sans" pitchFamily="34" charset="-120"/>
+              </a:rPr>
+              <a:t>.</a:t>
+            </a:r>
+            <a:endParaRPr lang="en-US" sz="1700" dirty="0"/>
+          </a:p>
+        </p:txBody>
+      </p:sp>
+      <p:sp>
+        <p:nvSpPr>
+          <p:cNvPr id="13" name="Shape 11"/>
+          <p:cNvSpPr/>
+          <p:nvPr/>
+        </p:nvSpPr>
+        <p:spPr>
+          <a:xfrm>
+            <a:off x="10515600" y="3429000"/>
+            <a:ext cx="868680" cy="493776"/>
+          </a:xfrm>
+          <a:prstGeom prst="roundRect">
+            <a:avLst>
+              <a:gd name="adj" fmla="val 18519"/>
+            </a:avLst>
+          </a:prstGeom>
+          <a:solidFill>
+            <a:srgbClr val="EEF2FB"/>
+          </a:solidFill>
+          <a:ln/>
+        </p:spPr>
+      </p:sp>
+      <p:sp>
+        <p:nvSpPr>
+          <p:cNvPr id="14" name="Text 12"/>
+          <p:cNvSpPr txBox="1"/>
+          <p:nvPr/>
+        </p:nvSpPr>
+        <p:spPr>
+          <a:xfrm>
+            <a:off x="10515600" y="3429000"/>
+            <a:ext cx="868680" cy="493776"/>
+          </a:xfrm>
+          <a:prstGeom prst="rect">
+            <a:avLst/>
+          </a:prstGeom>
+          <a:noFill/>
+          <a:ln/>
+        </p:spPr>
+        <p:txBody>
+          <a:bodyPr wrap="square" lIns="0" tIns="0" rIns="0" bIns="0" rtlCol="0" anchor="ctr"/>
+          <a:lstStyle/>
+          <a:p>
+            <a:pPr algn="ctr" indent="0" marL="0">
+              <a:buNone/>
+            </a:pPr>
+            <a:r>
+              <a:rPr lang="en-US" sz="1500" b="1" dirty="0">
+                <a:solidFill>
+                  <a:srgbClr val="2D63FF"/>
+                </a:solidFill>
+                <a:latin typeface="IBM Plex Mono" pitchFamily="34" charset="0"/>
+                <a:ea typeface="IBM Plex Mono" pitchFamily="34" charset="-122"/>
+                <a:cs typeface="IBM Plex Mono" pitchFamily="34" charset="-120"/>
+              </a:rPr>
+              <a:t>[5]</a:t>
+            </a:r>
+            <a:endParaRPr lang="en-US" sz="1500" dirty="0"/>
+          </a:p>
+        </p:txBody>
+      </p:sp>
+      <p:sp>
+        <p:nvSpPr>
+          <p:cNvPr id="15" name="Shape 13"/>
+          <p:cNvSpPr/>
+          <p:nvPr/>
+        </p:nvSpPr>
+        <p:spPr>
+          <a:xfrm>
+            <a:off x="502920" y="4425696"/>
+            <a:ext cx="11155680" cy="1097280"/>
+          </a:xfrm>
+          <a:prstGeom prst="roundRect">
+            <a:avLst>
+              <a:gd name="adj" fmla="val 10000"/>
+            </a:avLst>
+          </a:prstGeom>
+          <a:solidFill>
+            <a:srgbClr val="FFFFFF"/>
+          </a:solidFill>
+          <a:ln w="15875">
+            <a:solidFill>
+              <a:srgbClr val="D9DEE7"/>
+            </a:solidFill>
+            <a:prstDash val="solid"/>
+          </a:ln>
+        </p:spPr>
+      </p:sp>
+      <p:sp>
+        <p:nvSpPr>
+          <p:cNvPr id="16" name="Text 14"/>
+          <p:cNvSpPr txBox="1"/>
+          <p:nvPr/>
+        </p:nvSpPr>
+        <p:spPr>
+          <a:xfrm>
+            <a:off x="914400" y="4535424"/>
+            <a:ext cx="9418320" cy="877824"/>
+          </a:xfrm>
+          <a:prstGeom prst="rect">
+            <a:avLst/>
+          </a:prstGeom>
+          <a:noFill/>
+          <a:ln/>
+        </p:spPr>
+        <p:txBody>
+          <a:bodyPr wrap="square" lIns="0" tIns="0" rIns="0" bIns="0" rtlCol="0" anchor="ctr"/>
+          <a:lstStyle/>
+          <a:p>
+            <a:pPr indent="0" marL="0">
+              <a:lnSpc>
+                <a:spcPct val="118000"/>
+              </a:lnSpc>
+              <a:buNone/>
+            </a:pPr>
+            <a:r>
+              <a:rPr lang="en-US" sz="1700" dirty="0">
+                <a:solidFill>
+                  <a:srgbClr val="101828"/>
+                </a:solidFill>
+                <a:latin typeface="IBM Plex Sans" pitchFamily="34" charset="0"/>
+                <a:ea typeface="IBM Plex Sans" pitchFamily="34" charset="-122"/>
+                <a:cs typeface="IBM Plex Sans" pitchFamily="34" charset="-120"/>
+              </a:rPr>
+              <a:t>Write a program that reads five words into a list, removes a word the user types in, then prints the words that are left and how many there are.</a:t>
+            </a:r>
+            <a:endParaRPr lang="en-US" sz="1700" dirty="0"/>
+          </a:p>
+        </p:txBody>
+      </p:sp>
+      <p:sp>
+        <p:nvSpPr>
+          <p:cNvPr id="17" name="Shape 15"/>
+          <p:cNvSpPr/>
+          <p:nvPr/>
+        </p:nvSpPr>
+        <p:spPr>
+          <a:xfrm>
+            <a:off x="10515600" y="4727448"/>
+            <a:ext cx="868680" cy="493776"/>
+          </a:xfrm>
+          <a:prstGeom prst="roundRect">
+            <a:avLst>
+              <a:gd name="adj" fmla="val 18519"/>
+            </a:avLst>
+          </a:prstGeom>
+          <a:solidFill>
+            <a:srgbClr val="EEF2FB"/>
+          </a:solidFill>
+          <a:ln/>
+        </p:spPr>
+      </p:sp>
+      <p:sp>
+        <p:nvSpPr>
+          <p:cNvPr id="18" name="Text 16"/>
+          <p:cNvSpPr txBox="1"/>
+          <p:nvPr/>
+        </p:nvSpPr>
+        <p:spPr>
+          <a:xfrm>
+            <a:off x="10515600" y="4727448"/>
+            <a:ext cx="868680" cy="493776"/>
+          </a:xfrm>
+          <a:prstGeom prst="rect">
+            <a:avLst/>
+          </a:prstGeom>
+          <a:noFill/>
+          <a:ln/>
+        </p:spPr>
+        <p:txBody>
+          <a:bodyPr wrap="square" lIns="0" tIns="0" rIns="0" bIns="0" rtlCol="0" anchor="ctr"/>
+          <a:lstStyle/>
+          <a:p>
+            <a:pPr algn="ctr" indent="0" marL="0">
+              <a:buNone/>
+            </a:pPr>
+            <a:r>
+              <a:rPr lang="en-US" sz="1500" b="1" dirty="0">
+                <a:solidFill>
+                  <a:srgbClr val="2D63FF"/>
+                </a:solidFill>
+                <a:latin typeface="IBM Plex Mono" pitchFamily="34" charset="0"/>
+                <a:ea typeface="IBM Plex Mono" pitchFamily="34" charset="-122"/>
+                <a:cs typeface="IBM Plex Mono" pitchFamily="34" charset="-120"/>
+              </a:rPr>
+              <a:t>[4]</a:t>
+            </a:r>
+            <a:endParaRPr lang="en-US" sz="1500" dirty="0"/>
+          </a:p>
+        </p:txBody>
+      </p:sp>
+    </p:spTree>
+  </p:cSld>
+  <p:clrMapOvr>
+    <a:masterClrMapping/>
+  </p:clrMapOvr>
+</p:sld>
+</file>
+
+<file path=ppt/slides/slide15.xml><?xml version="1.0" encoding="utf-8"?>
+<p:sld xmlns:a="http://schemas.openxmlformats.org/drawingml/2006/main" xmlns:r="http://schemas.openxmlformats.org/officeDocument/2006/relationships" xmlns:p="http://schemas.openxmlformats.org/presentationml/2006/main">
+  <p:cSld name="Slide 15">
     <p:bg>
       <p:bgPr>
         <a:solidFill>
